--- a/figs/fig1.pptx
+++ b/figs/fig1.pptx
@@ -197,7 +197,7 @@
           <a:p>
             <a:fld id="{5DF92A86-B628-864C-9AF3-B79AFF270722}" type="datetimeFigureOut">
               <a:rPr lang="en-TW" smtClean="0"/>
-              <a:t>2025/4/14</a:t>
+              <a:t>2026/3/21</a:t>
             </a:fld>
             <a:endParaRPr lang="en-TW"/>
           </a:p>
@@ -614,7 +614,7 @@
           <a:p>
             <a:fld id="{7698CBF1-00AE-0843-BB2C-DC6DB3159B14}" type="datetimeFigureOut">
               <a:rPr lang="en-TW" smtClean="0"/>
-              <a:t>2025/4/14</a:t>
+              <a:t>2026/3/21</a:t>
             </a:fld>
             <a:endParaRPr lang="en-TW"/>
           </a:p>
@@ -814,7 +814,7 @@
           <a:p>
             <a:fld id="{7698CBF1-00AE-0843-BB2C-DC6DB3159B14}" type="datetimeFigureOut">
               <a:rPr lang="en-TW" smtClean="0"/>
-              <a:t>2025/4/14</a:t>
+              <a:t>2026/3/21</a:t>
             </a:fld>
             <a:endParaRPr lang="en-TW"/>
           </a:p>
@@ -1024,7 +1024,7 @@
           <a:p>
             <a:fld id="{7698CBF1-00AE-0843-BB2C-DC6DB3159B14}" type="datetimeFigureOut">
               <a:rPr lang="en-TW" smtClean="0"/>
-              <a:t>2025/4/14</a:t>
+              <a:t>2026/3/21</a:t>
             </a:fld>
             <a:endParaRPr lang="en-TW"/>
           </a:p>
@@ -1224,7 +1224,7 @@
           <a:p>
             <a:fld id="{7698CBF1-00AE-0843-BB2C-DC6DB3159B14}" type="datetimeFigureOut">
               <a:rPr lang="en-TW" smtClean="0"/>
-              <a:t>2025/4/14</a:t>
+              <a:t>2026/3/21</a:t>
             </a:fld>
             <a:endParaRPr lang="en-TW"/>
           </a:p>
@@ -1500,7 +1500,7 @@
           <a:p>
             <a:fld id="{7698CBF1-00AE-0843-BB2C-DC6DB3159B14}" type="datetimeFigureOut">
               <a:rPr lang="en-TW" smtClean="0"/>
-              <a:t>2025/4/14</a:t>
+              <a:t>2026/3/21</a:t>
             </a:fld>
             <a:endParaRPr lang="en-TW"/>
           </a:p>
@@ -1768,7 +1768,7 @@
           <a:p>
             <a:fld id="{7698CBF1-00AE-0843-BB2C-DC6DB3159B14}" type="datetimeFigureOut">
               <a:rPr lang="en-TW" smtClean="0"/>
-              <a:t>2025/4/14</a:t>
+              <a:t>2026/3/21</a:t>
             </a:fld>
             <a:endParaRPr lang="en-TW"/>
           </a:p>
@@ -2183,7 +2183,7 @@
           <a:p>
             <a:fld id="{7698CBF1-00AE-0843-BB2C-DC6DB3159B14}" type="datetimeFigureOut">
               <a:rPr lang="en-TW" smtClean="0"/>
-              <a:t>2025/4/14</a:t>
+              <a:t>2026/3/21</a:t>
             </a:fld>
             <a:endParaRPr lang="en-TW"/>
           </a:p>
@@ -2325,7 +2325,7 @@
           <a:p>
             <a:fld id="{7698CBF1-00AE-0843-BB2C-DC6DB3159B14}" type="datetimeFigureOut">
               <a:rPr lang="en-TW" smtClean="0"/>
-              <a:t>2025/4/14</a:t>
+              <a:t>2026/3/21</a:t>
             </a:fld>
             <a:endParaRPr lang="en-TW"/>
           </a:p>
@@ -2438,7 +2438,7 @@
           <a:p>
             <a:fld id="{7698CBF1-00AE-0843-BB2C-DC6DB3159B14}" type="datetimeFigureOut">
               <a:rPr lang="en-TW" smtClean="0"/>
-              <a:t>2025/4/14</a:t>
+              <a:t>2026/3/21</a:t>
             </a:fld>
             <a:endParaRPr lang="en-TW"/>
           </a:p>
@@ -2751,7 +2751,7 @@
           <a:p>
             <a:fld id="{7698CBF1-00AE-0843-BB2C-DC6DB3159B14}" type="datetimeFigureOut">
               <a:rPr lang="en-TW" smtClean="0"/>
-              <a:t>2025/4/14</a:t>
+              <a:t>2026/3/21</a:t>
             </a:fld>
             <a:endParaRPr lang="en-TW"/>
           </a:p>
@@ -3040,7 +3040,7 @@
           <a:p>
             <a:fld id="{7698CBF1-00AE-0843-BB2C-DC6DB3159B14}" type="datetimeFigureOut">
               <a:rPr lang="en-TW" smtClean="0"/>
-              <a:t>2025/4/14</a:t>
+              <a:t>2026/3/21</a:t>
             </a:fld>
             <a:endParaRPr lang="en-TW"/>
           </a:p>
@@ -3283,7 +3283,7 @@
           <a:p>
             <a:fld id="{7698CBF1-00AE-0843-BB2C-DC6DB3159B14}" type="datetimeFigureOut">
               <a:rPr lang="en-TW" smtClean="0"/>
-              <a:t>2025/4/14</a:t>
+              <a:t>2026/3/21</a:t>
             </a:fld>
             <a:endParaRPr lang="en-TW"/>
           </a:p>
@@ -3723,6 +3723,96 @@
           <a:xfrm>
             <a:off x="4714505" y="1330036"/>
             <a:ext cx="4940134" cy="5074690"/>
+          </a:xfrm>
+          <a:prstGeom prst="rect">
+            <a:avLst/>
+          </a:prstGeom>
+        </p:spPr>
+      </p:pic>
+      <p:pic>
+        <p:nvPicPr>
+          <p:cNvPr id="3" name="Picture 2">
+            <a:extLst>
+              <a:ext uri="{FF2B5EF4-FFF2-40B4-BE49-F238E27FC236}">
+                <a16:creationId xmlns:a16="http://schemas.microsoft.com/office/drawing/2014/main" id="{21730372-E205-A209-5BEB-51B54FB7EF99}"/>
+              </a:ext>
+            </a:extLst>
+          </p:cNvPr>
+          <p:cNvPicPr>
+            <a:picLocks noChangeAspect="1"/>
+          </p:cNvPicPr>
+          <p:nvPr/>
+        </p:nvPicPr>
+        <p:blipFill>
+          <a:blip r:embed="rId3"/>
+          <a:stretch>
+            <a:fillRect/>
+          </a:stretch>
+        </p:blipFill>
+        <p:spPr>
+          <a:xfrm>
+            <a:off x="857359" y="1735495"/>
+            <a:ext cx="3360001" cy="1440000"/>
+          </a:xfrm>
+          <a:prstGeom prst="rect">
+            <a:avLst/>
+          </a:prstGeom>
+        </p:spPr>
+      </p:pic>
+      <p:pic>
+        <p:nvPicPr>
+          <p:cNvPr id="6" name="Picture 5">
+            <a:extLst>
+              <a:ext uri="{FF2B5EF4-FFF2-40B4-BE49-F238E27FC236}">
+                <a16:creationId xmlns:a16="http://schemas.microsoft.com/office/drawing/2014/main" id="{9571711B-0488-D947-2EA9-289BF5CA1CA0}"/>
+              </a:ext>
+            </a:extLst>
+          </p:cNvPr>
+          <p:cNvPicPr>
+            <a:picLocks noChangeAspect="1"/>
+          </p:cNvPicPr>
+          <p:nvPr/>
+        </p:nvPicPr>
+        <p:blipFill>
+          <a:blip r:embed="rId4"/>
+          <a:stretch>
+            <a:fillRect/>
+          </a:stretch>
+        </p:blipFill>
+        <p:spPr>
+          <a:xfrm>
+            <a:off x="857359" y="3177071"/>
+            <a:ext cx="3360001" cy="1440000"/>
+          </a:xfrm>
+          <a:prstGeom prst="rect">
+            <a:avLst/>
+          </a:prstGeom>
+        </p:spPr>
+      </p:pic>
+      <p:pic>
+        <p:nvPicPr>
+          <p:cNvPr id="8" name="Picture 7">
+            <a:extLst>
+              <a:ext uri="{FF2B5EF4-FFF2-40B4-BE49-F238E27FC236}">
+                <a16:creationId xmlns:a16="http://schemas.microsoft.com/office/drawing/2014/main" id="{4E10666E-5090-EA0A-AEBF-E4F075D1E93D}"/>
+              </a:ext>
+            </a:extLst>
+          </p:cNvPr>
+          <p:cNvPicPr>
+            <a:picLocks noChangeAspect="1"/>
+          </p:cNvPicPr>
+          <p:nvPr/>
+        </p:nvPicPr>
+        <p:blipFill>
+          <a:blip r:embed="rId5"/>
+          <a:stretch>
+            <a:fillRect/>
+          </a:stretch>
+        </p:blipFill>
+        <p:spPr>
+          <a:xfrm>
+            <a:off x="857360" y="4620224"/>
+            <a:ext cx="3360001" cy="1440000"/>
           </a:xfrm>
           <a:prstGeom prst="rect">
             <a:avLst/>

--- a/figs/fig1.pptx
+++ b/figs/fig1.pptx
@@ -5,10 +5,11 @@
     <p:sldMasterId id="2147483648" r:id="rId1"/>
   </p:sldMasterIdLst>
   <p:notesMasterIdLst>
-    <p:notesMasterId r:id="rId3"/>
+    <p:notesMasterId r:id="rId4"/>
   </p:notesMasterIdLst>
   <p:sldIdLst>
     <p:sldId id="272" r:id="rId2"/>
+    <p:sldId id="273" r:id="rId3"/>
   </p:sldIdLst>
   <p:sldSz cx="12192000" cy="6858000"/>
   <p:notesSz cx="6858000" cy="9144000"/>
@@ -197,7 +198,7 @@
           <a:p>
             <a:fld id="{5DF92A86-B628-864C-9AF3-B79AFF270722}" type="datetimeFigureOut">
               <a:rPr lang="en-TW" smtClean="0"/>
-              <a:t>2026/3/21</a:t>
+              <a:t>2026/3/29</a:t>
             </a:fld>
             <a:endParaRPr lang="en-TW"/>
           </a:p>
@@ -614,7 +615,7 @@
           <a:p>
             <a:fld id="{7698CBF1-00AE-0843-BB2C-DC6DB3159B14}" type="datetimeFigureOut">
               <a:rPr lang="en-TW" smtClean="0"/>
-              <a:t>2026/3/21</a:t>
+              <a:t>2026/3/29</a:t>
             </a:fld>
             <a:endParaRPr lang="en-TW"/>
           </a:p>
@@ -814,7 +815,7 @@
           <a:p>
             <a:fld id="{7698CBF1-00AE-0843-BB2C-DC6DB3159B14}" type="datetimeFigureOut">
               <a:rPr lang="en-TW" smtClean="0"/>
-              <a:t>2026/3/21</a:t>
+              <a:t>2026/3/29</a:t>
             </a:fld>
             <a:endParaRPr lang="en-TW"/>
           </a:p>
@@ -1024,7 +1025,7 @@
           <a:p>
             <a:fld id="{7698CBF1-00AE-0843-BB2C-DC6DB3159B14}" type="datetimeFigureOut">
               <a:rPr lang="en-TW" smtClean="0"/>
-              <a:t>2026/3/21</a:t>
+              <a:t>2026/3/29</a:t>
             </a:fld>
             <a:endParaRPr lang="en-TW"/>
           </a:p>
@@ -1224,7 +1225,7 @@
           <a:p>
             <a:fld id="{7698CBF1-00AE-0843-BB2C-DC6DB3159B14}" type="datetimeFigureOut">
               <a:rPr lang="en-TW" smtClean="0"/>
-              <a:t>2026/3/21</a:t>
+              <a:t>2026/3/29</a:t>
             </a:fld>
             <a:endParaRPr lang="en-TW"/>
           </a:p>
@@ -1500,7 +1501,7 @@
           <a:p>
             <a:fld id="{7698CBF1-00AE-0843-BB2C-DC6DB3159B14}" type="datetimeFigureOut">
               <a:rPr lang="en-TW" smtClean="0"/>
-              <a:t>2026/3/21</a:t>
+              <a:t>2026/3/29</a:t>
             </a:fld>
             <a:endParaRPr lang="en-TW"/>
           </a:p>
@@ -1768,7 +1769,7 @@
           <a:p>
             <a:fld id="{7698CBF1-00AE-0843-BB2C-DC6DB3159B14}" type="datetimeFigureOut">
               <a:rPr lang="en-TW" smtClean="0"/>
-              <a:t>2026/3/21</a:t>
+              <a:t>2026/3/29</a:t>
             </a:fld>
             <a:endParaRPr lang="en-TW"/>
           </a:p>
@@ -2183,7 +2184,7 @@
           <a:p>
             <a:fld id="{7698CBF1-00AE-0843-BB2C-DC6DB3159B14}" type="datetimeFigureOut">
               <a:rPr lang="en-TW" smtClean="0"/>
-              <a:t>2026/3/21</a:t>
+              <a:t>2026/3/29</a:t>
             </a:fld>
             <a:endParaRPr lang="en-TW"/>
           </a:p>
@@ -2325,7 +2326,7 @@
           <a:p>
             <a:fld id="{7698CBF1-00AE-0843-BB2C-DC6DB3159B14}" type="datetimeFigureOut">
               <a:rPr lang="en-TW" smtClean="0"/>
-              <a:t>2026/3/21</a:t>
+              <a:t>2026/3/29</a:t>
             </a:fld>
             <a:endParaRPr lang="en-TW"/>
           </a:p>
@@ -2438,7 +2439,7 @@
           <a:p>
             <a:fld id="{7698CBF1-00AE-0843-BB2C-DC6DB3159B14}" type="datetimeFigureOut">
               <a:rPr lang="en-TW" smtClean="0"/>
-              <a:t>2026/3/21</a:t>
+              <a:t>2026/3/29</a:t>
             </a:fld>
             <a:endParaRPr lang="en-TW"/>
           </a:p>
@@ -2751,7 +2752,7 @@
           <a:p>
             <a:fld id="{7698CBF1-00AE-0843-BB2C-DC6DB3159B14}" type="datetimeFigureOut">
               <a:rPr lang="en-TW" smtClean="0"/>
-              <a:t>2026/3/21</a:t>
+              <a:t>2026/3/29</a:t>
             </a:fld>
             <a:endParaRPr lang="en-TW"/>
           </a:p>
@@ -3040,7 +3041,7 @@
           <a:p>
             <a:fld id="{7698CBF1-00AE-0843-BB2C-DC6DB3159B14}" type="datetimeFigureOut">
               <a:rPr lang="en-TW" smtClean="0"/>
-              <a:t>2026/3/21</a:t>
+              <a:t>2026/3/29</a:t>
             </a:fld>
             <a:endParaRPr lang="en-TW"/>
           </a:p>
@@ -3283,7 +3284,7 @@
           <a:p>
             <a:fld id="{7698CBF1-00AE-0843-BB2C-DC6DB3159B14}" type="datetimeFigureOut">
               <a:rPr lang="en-TW" smtClean="0"/>
-              <a:t>2026/3/21</a:t>
+              <a:t>2026/3/29</a:t>
             </a:fld>
             <a:endParaRPr lang="en-TW"/>
           </a:p>
@@ -3721,8 +3722,8 @@
         </p:blipFill>
         <p:spPr>
           <a:xfrm>
-            <a:off x="4714505" y="1330036"/>
-            <a:ext cx="4940134" cy="5074690"/>
+            <a:off x="4696014" y="3598538"/>
+            <a:ext cx="2396414" cy="2461686"/>
           </a:xfrm>
           <a:prstGeom prst="rect">
             <a:avLst/>
@@ -3745,14 +3746,15 @@
         </p:nvPicPr>
         <p:blipFill>
           <a:blip r:embed="rId3"/>
+          <a:srcRect r="3215"/>
           <a:stretch>
             <a:fillRect/>
           </a:stretch>
         </p:blipFill>
         <p:spPr>
           <a:xfrm>
-            <a:off x="857359" y="1735495"/>
-            <a:ext cx="3360001" cy="1440000"/>
+            <a:off x="857360" y="1837095"/>
+            <a:ext cx="3251998" cy="1440000"/>
           </a:xfrm>
           <a:prstGeom prst="rect">
             <a:avLst/>
@@ -3775,14 +3777,15 @@
         </p:nvPicPr>
         <p:blipFill>
           <a:blip r:embed="rId4"/>
+          <a:srcRect t="6946" r="3215"/>
           <a:stretch>
             <a:fillRect/>
           </a:stretch>
         </p:blipFill>
         <p:spPr>
           <a:xfrm>
-            <a:off x="857359" y="3177071"/>
-            <a:ext cx="3360001" cy="1440000"/>
+            <a:off x="857360" y="3277095"/>
+            <a:ext cx="3251998" cy="1339976"/>
           </a:xfrm>
           <a:prstGeom prst="rect">
             <a:avLst/>
@@ -3805,6 +3808,7 @@
         </p:nvPicPr>
         <p:blipFill>
           <a:blip r:embed="rId5"/>
+          <a:srcRect r="3215"/>
           <a:stretch>
             <a:fillRect/>
           </a:stretch>
@@ -3812,17 +3816,2566 @@
         <p:spPr>
           <a:xfrm>
             <a:off x="857360" y="4620224"/>
-            <a:ext cx="3360001" cy="1440000"/>
+            <a:ext cx="3251997" cy="1440000"/>
           </a:xfrm>
           <a:prstGeom prst="rect">
             <a:avLst/>
           </a:prstGeom>
+        </p:spPr>
+      </p:pic>
+      <p:sp>
+        <p:nvSpPr>
+          <p:cNvPr id="2" name="TextBox 1">
+            <a:extLst>
+              <a:ext uri="{FF2B5EF4-FFF2-40B4-BE49-F238E27FC236}">
+                <a16:creationId xmlns:a16="http://schemas.microsoft.com/office/drawing/2014/main" id="{2C7B215C-533D-C650-B23C-4672267408C1}"/>
+              </a:ext>
+            </a:extLst>
+          </p:cNvPr>
+          <p:cNvSpPr txBox="1"/>
+          <p:nvPr/>
+        </p:nvSpPr>
+        <p:spPr>
+          <a:xfrm rot="16200000">
+            <a:off x="-31697" y="2390404"/>
+            <a:ext cx="1531892" cy="246221"/>
+          </a:xfrm>
+          <a:prstGeom prst="rect">
+            <a:avLst/>
+          </a:prstGeom>
+          <a:noFill/>
+        </p:spPr>
+        <p:txBody>
+          <a:bodyPr wrap="square" rtlCol="0">
+            <a:spAutoFit/>
+          </a:bodyPr>
+          <a:lstStyle/>
+          <a:p>
+            <a:pPr algn="ctr"/>
+            <a:r>
+              <a:rPr lang="en-TW" sz="1000" b="1" dirty="0">
+                <a:solidFill>
+                  <a:srgbClr val="961208"/>
+                </a:solidFill>
+                <a:latin typeface="Arial" panose="020B0604020202020204" pitchFamily="34" charset="0"/>
+                <a:cs typeface="Arial" panose="020B0604020202020204" pitchFamily="34" charset="0"/>
+              </a:rPr>
+              <a:t>Dry-Eye</a:t>
+            </a:r>
+          </a:p>
+        </p:txBody>
+      </p:sp>
+      <p:sp>
+        <p:nvSpPr>
+          <p:cNvPr id="5" name="TextBox 4">
+            <a:extLst>
+              <a:ext uri="{FF2B5EF4-FFF2-40B4-BE49-F238E27FC236}">
+                <a16:creationId xmlns:a16="http://schemas.microsoft.com/office/drawing/2014/main" id="{48A4FF5D-0884-B08B-6261-8485D313FA7F}"/>
+              </a:ext>
+            </a:extLst>
+          </p:cNvPr>
+          <p:cNvSpPr txBox="1"/>
+          <p:nvPr/>
+        </p:nvSpPr>
+        <p:spPr>
+          <a:xfrm rot="16200000">
+            <a:off x="14247" y="3775537"/>
+            <a:ext cx="1440002" cy="246221"/>
+          </a:xfrm>
+          <a:prstGeom prst="rect">
+            <a:avLst/>
+          </a:prstGeom>
+          <a:noFill/>
+        </p:spPr>
+        <p:txBody>
+          <a:bodyPr wrap="square" rtlCol="0">
+            <a:spAutoFit/>
+          </a:bodyPr>
+          <a:lstStyle/>
+          <a:p>
+            <a:pPr algn="ctr"/>
+            <a:r>
+              <a:rPr lang="en-TW" sz="1000" b="1" dirty="0">
+                <a:solidFill>
+                  <a:srgbClr val="00147F"/>
+                </a:solidFill>
+                <a:latin typeface="Arial" panose="020B0604020202020204" pitchFamily="34" charset="0"/>
+                <a:cs typeface="Arial" panose="020B0604020202020204" pitchFamily="34" charset="0"/>
+              </a:rPr>
+              <a:t>Depression</a:t>
+            </a:r>
+          </a:p>
+        </p:txBody>
+      </p:sp>
+      <p:sp>
+        <p:nvSpPr>
+          <p:cNvPr id="7" name="TextBox 6">
+            <a:extLst>
+              <a:ext uri="{FF2B5EF4-FFF2-40B4-BE49-F238E27FC236}">
+                <a16:creationId xmlns:a16="http://schemas.microsoft.com/office/drawing/2014/main" id="{80F414B2-8E6B-C7BA-997B-67BAC5F1549F}"/>
+              </a:ext>
+            </a:extLst>
+          </p:cNvPr>
+          <p:cNvSpPr txBox="1"/>
+          <p:nvPr/>
+        </p:nvSpPr>
+        <p:spPr>
+          <a:xfrm rot="16200000">
+            <a:off x="14247" y="5217113"/>
+            <a:ext cx="1440002" cy="246221"/>
+          </a:xfrm>
+          <a:prstGeom prst="rect">
+            <a:avLst/>
+          </a:prstGeom>
+          <a:noFill/>
+        </p:spPr>
+        <p:txBody>
+          <a:bodyPr wrap="square" rtlCol="0">
+            <a:spAutoFit/>
+          </a:bodyPr>
+          <a:lstStyle/>
+          <a:p>
+            <a:pPr algn="ctr"/>
+            <a:r>
+              <a:rPr lang="en-TW" sz="1000" b="1" dirty="0">
+                <a:solidFill>
+                  <a:srgbClr val="B88F23"/>
+                </a:solidFill>
+                <a:latin typeface="Arial" panose="020B0604020202020204" pitchFamily="34" charset="0"/>
+                <a:cs typeface="Arial" panose="020B0604020202020204" pitchFamily="34" charset="0"/>
+              </a:rPr>
+              <a:t>Irritable Bowel</a:t>
+            </a:r>
+          </a:p>
+        </p:txBody>
+      </p:sp>
+      <p:sp>
+        <p:nvSpPr>
+          <p:cNvPr id="9" name="TextBox 8">
+            <a:extLst>
+              <a:ext uri="{FF2B5EF4-FFF2-40B4-BE49-F238E27FC236}">
+                <a16:creationId xmlns:a16="http://schemas.microsoft.com/office/drawing/2014/main" id="{E24B0F06-D8A5-59E4-97AF-E05F85E7B53E}"/>
+              </a:ext>
+            </a:extLst>
+          </p:cNvPr>
+          <p:cNvSpPr txBox="1"/>
+          <p:nvPr/>
+        </p:nvSpPr>
+        <p:spPr>
+          <a:xfrm>
+            <a:off x="1771459" y="1507468"/>
+            <a:ext cx="2445901" cy="276999"/>
+          </a:xfrm>
+          <a:prstGeom prst="rect">
+            <a:avLst/>
+          </a:prstGeom>
+          <a:noFill/>
+        </p:spPr>
+        <p:txBody>
+          <a:bodyPr wrap="square" rtlCol="0">
+            <a:spAutoFit/>
+          </a:bodyPr>
+          <a:lstStyle/>
+          <a:p>
+            <a:pPr algn="r"/>
+            <a:r>
+              <a:rPr lang="en-TW" sz="1200" b="1" i="1" dirty="0">
+                <a:latin typeface="Arial" panose="020B0604020202020204" pitchFamily="34" charset="0"/>
+                <a:cs typeface="Arial" panose="020B0604020202020204" pitchFamily="34" charset="0"/>
+              </a:rPr>
+              <a:t>GWAS &amp; LD adjustments</a:t>
+            </a:r>
+          </a:p>
+        </p:txBody>
+      </p:sp>
+      <p:cxnSp>
+        <p:nvCxnSpPr>
+          <p:cNvPr id="12" name="Straight Connector 11">
+            <a:extLst>
+              <a:ext uri="{FF2B5EF4-FFF2-40B4-BE49-F238E27FC236}">
+                <a16:creationId xmlns:a16="http://schemas.microsoft.com/office/drawing/2014/main" id="{815B4BFE-BCC6-41E4-1C37-E2618014CADE}"/>
+              </a:ext>
+            </a:extLst>
+          </p:cNvPr>
+          <p:cNvCxnSpPr/>
+          <p:nvPr/>
+        </p:nvCxnSpPr>
+        <p:spPr>
+          <a:xfrm flipH="1">
+            <a:off x="612448" y="1645967"/>
+            <a:ext cx="1674863" cy="0"/>
+          </a:xfrm>
+          <a:prstGeom prst="line">
+            <a:avLst/>
+          </a:prstGeom>
+        </p:spPr>
+        <p:style>
+          <a:lnRef idx="2">
+            <a:schemeClr val="dk1"/>
+          </a:lnRef>
+          <a:fillRef idx="0">
+            <a:schemeClr val="dk1"/>
+          </a:fillRef>
+          <a:effectRef idx="1">
+            <a:schemeClr val="dk1"/>
+          </a:effectRef>
+          <a:fontRef idx="minor">
+            <a:schemeClr val="tx1"/>
+          </a:fontRef>
+        </p:style>
+      </p:cxnSp>
+      <p:sp>
+        <p:nvSpPr>
+          <p:cNvPr id="15" name="Oval 14">
+            <a:extLst>
+              <a:ext uri="{FF2B5EF4-FFF2-40B4-BE49-F238E27FC236}">
+                <a16:creationId xmlns:a16="http://schemas.microsoft.com/office/drawing/2014/main" id="{F6A438F9-24AC-034F-7134-B0A41FA23A86}"/>
+              </a:ext>
+            </a:extLst>
+          </p:cNvPr>
+          <p:cNvSpPr>
+            <a:spLocks noChangeAspect="1"/>
+          </p:cNvSpPr>
+          <p:nvPr/>
+        </p:nvSpPr>
+        <p:spPr>
+          <a:xfrm>
+            <a:off x="591381" y="1627827"/>
+            <a:ext cx="36062" cy="36000"/>
+          </a:xfrm>
+          <a:prstGeom prst="ellipse">
+            <a:avLst/>
+          </a:prstGeom>
+          <a:solidFill>
+            <a:schemeClr val="tx1"/>
+          </a:solidFill>
+          <a:ln>
+            <a:solidFill>
+              <a:schemeClr val="tx1"/>
+            </a:solidFill>
+          </a:ln>
+        </p:spPr>
+        <p:style>
+          <a:lnRef idx="2">
+            <a:schemeClr val="accent1">
+              <a:shade val="15000"/>
+            </a:schemeClr>
+          </a:lnRef>
+          <a:fillRef idx="1">
+            <a:schemeClr val="accent1"/>
+          </a:fillRef>
+          <a:effectRef idx="0">
+            <a:schemeClr val="accent1"/>
+          </a:effectRef>
+          <a:fontRef idx="minor">
+            <a:schemeClr val="lt1"/>
+          </a:fontRef>
+        </p:style>
+        <p:txBody>
+          <a:bodyPr rtlCol="0" anchor="ctr"/>
+          <a:lstStyle/>
+          <a:p>
+            <a:pPr algn="ctr"/>
+            <a:endParaRPr lang="en-TW"/>
+          </a:p>
+        </p:txBody>
+      </p:sp>
+      <p:pic>
+        <p:nvPicPr>
+          <p:cNvPr id="19" name="Picture 18">
+            <a:extLst>
+              <a:ext uri="{FF2B5EF4-FFF2-40B4-BE49-F238E27FC236}">
+                <a16:creationId xmlns:a16="http://schemas.microsoft.com/office/drawing/2014/main" id="{77F7349F-7162-1EF1-4790-7244B0DADD9A}"/>
+              </a:ext>
+            </a:extLst>
+          </p:cNvPr>
+          <p:cNvPicPr>
+            <a:picLocks noChangeAspect="1"/>
+          </p:cNvPicPr>
+          <p:nvPr/>
+        </p:nvPicPr>
+        <p:blipFill>
+          <a:blip r:embed="rId6"/>
+          <a:stretch>
+            <a:fillRect/>
+          </a:stretch>
+        </p:blipFill>
+        <p:spPr>
+          <a:xfrm rot="21295030">
+            <a:off x="6070515" y="3057310"/>
+            <a:ext cx="1495253" cy="1469747"/>
+          </a:xfrm>
+          <a:prstGeom prst="ellipse">
+            <a:avLst/>
+          </a:prstGeom>
+        </p:spPr>
+      </p:pic>
+      <p:sp>
+        <p:nvSpPr>
+          <p:cNvPr id="20" name="TextBox 19">
+            <a:extLst>
+              <a:ext uri="{FF2B5EF4-FFF2-40B4-BE49-F238E27FC236}">
+                <a16:creationId xmlns:a16="http://schemas.microsoft.com/office/drawing/2014/main" id="{BDE7EFC1-06AC-F59E-B588-254628F96EAA}"/>
+              </a:ext>
+            </a:extLst>
+          </p:cNvPr>
+          <p:cNvSpPr txBox="1"/>
+          <p:nvPr/>
+        </p:nvSpPr>
+        <p:spPr>
+          <a:xfrm rot="18434530">
+            <a:off x="7183560" y="2954420"/>
+            <a:ext cx="533536" cy="338554"/>
+          </a:xfrm>
+          <a:prstGeom prst="rect">
+            <a:avLst/>
+          </a:prstGeom>
+          <a:solidFill>
+            <a:schemeClr val="bg1"/>
+          </a:solidFill>
+        </p:spPr>
+        <p:txBody>
+          <a:bodyPr wrap="square" lIns="18000" rtlCol="0">
+            <a:spAutoFit/>
+          </a:bodyPr>
+          <a:lstStyle/>
+          <a:p>
+            <a:r>
+              <a:rPr lang="en-US" sz="400" dirty="0"/>
+              <a:t>Cytokine production involved in immune response</a:t>
+            </a:r>
+            <a:endParaRPr lang="en-TW" sz="400" dirty="0"/>
+          </a:p>
+        </p:txBody>
+      </p:sp>
+      <p:sp>
+        <p:nvSpPr>
+          <p:cNvPr id="21" name="TextBox 20">
+            <a:extLst>
+              <a:ext uri="{FF2B5EF4-FFF2-40B4-BE49-F238E27FC236}">
+                <a16:creationId xmlns:a16="http://schemas.microsoft.com/office/drawing/2014/main" id="{C72CCB8E-B31F-E62D-D725-6BE678D74530}"/>
+              </a:ext>
+            </a:extLst>
+          </p:cNvPr>
+          <p:cNvSpPr txBox="1"/>
+          <p:nvPr/>
+        </p:nvSpPr>
+        <p:spPr>
+          <a:xfrm rot="20564914">
+            <a:off x="7480016" y="3352679"/>
+            <a:ext cx="702716" cy="338554"/>
+          </a:xfrm>
+          <a:prstGeom prst="rect">
+            <a:avLst/>
+          </a:prstGeom>
+          <a:solidFill>
+            <a:schemeClr val="bg1"/>
+          </a:solidFill>
+        </p:spPr>
+        <p:txBody>
+          <a:bodyPr wrap="square" lIns="18000" rtlCol="0">
+            <a:spAutoFit/>
+          </a:bodyPr>
+          <a:lstStyle/>
+          <a:p>
+            <a:r>
+              <a:rPr lang="en-US" sz="400" dirty="0"/>
+              <a:t>Positive regulation of cytokine production involved in immune response</a:t>
+            </a:r>
+          </a:p>
+        </p:txBody>
+      </p:sp>
+      <p:sp>
+        <p:nvSpPr>
+          <p:cNvPr id="22" name="TextBox 21">
+            <a:extLst>
+              <a:ext uri="{FF2B5EF4-FFF2-40B4-BE49-F238E27FC236}">
+                <a16:creationId xmlns:a16="http://schemas.microsoft.com/office/drawing/2014/main" id="{F1E858DC-D393-10E1-222A-2276A6D9565B}"/>
+              </a:ext>
+            </a:extLst>
+          </p:cNvPr>
+          <p:cNvSpPr txBox="1"/>
+          <p:nvPr/>
+        </p:nvSpPr>
+        <p:spPr>
+          <a:xfrm rot="1271553">
+            <a:off x="7441810" y="4034038"/>
+            <a:ext cx="784481" cy="217783"/>
+          </a:xfrm>
+          <a:prstGeom prst="rect">
+            <a:avLst/>
+          </a:prstGeom>
+          <a:solidFill>
+            <a:schemeClr val="bg1"/>
+          </a:solidFill>
+        </p:spPr>
+        <p:txBody>
+          <a:bodyPr wrap="square" lIns="18000" rtlCol="0">
+            <a:spAutoFit/>
+          </a:bodyPr>
+          <a:lstStyle/>
+          <a:p>
+            <a:r>
+              <a:rPr lang="en-US" sz="400" dirty="0"/>
+              <a:t>Positive regulation of interleukin 6 production</a:t>
+            </a:r>
+          </a:p>
+        </p:txBody>
+      </p:sp>
+      <p:sp>
+        <p:nvSpPr>
+          <p:cNvPr id="23" name="TextBox 22">
+            <a:extLst>
+              <a:ext uri="{FF2B5EF4-FFF2-40B4-BE49-F238E27FC236}">
+                <a16:creationId xmlns:a16="http://schemas.microsoft.com/office/drawing/2014/main" id="{7490BD9E-FA79-7EA4-FF17-9B2B09CF1060}"/>
+              </a:ext>
+            </a:extLst>
+          </p:cNvPr>
+          <p:cNvSpPr txBox="1"/>
+          <p:nvPr/>
+        </p:nvSpPr>
+        <p:spPr>
+          <a:xfrm rot="3721374">
+            <a:off x="7017817" y="4461896"/>
+            <a:ext cx="679757" cy="276999"/>
+          </a:xfrm>
+          <a:prstGeom prst="rect">
+            <a:avLst/>
+          </a:prstGeom>
+          <a:solidFill>
+            <a:schemeClr val="bg1"/>
+          </a:solidFill>
+        </p:spPr>
+        <p:txBody>
+          <a:bodyPr wrap="square" lIns="18000" rtlCol="0">
+            <a:spAutoFit/>
+          </a:bodyPr>
+          <a:lstStyle/>
+          <a:p>
+            <a:r>
+              <a:rPr lang="en-US" sz="400" dirty="0"/>
+              <a:t>Tumor necrosis factor superfamily</a:t>
+            </a:r>
+          </a:p>
+          <a:p>
+            <a:r>
+              <a:rPr lang="en-US" sz="400" dirty="0"/>
+              <a:t>cytokine production</a:t>
+            </a:r>
+          </a:p>
+        </p:txBody>
+      </p:sp>
+      <p:sp>
+        <p:nvSpPr>
+          <p:cNvPr id="24" name="TextBox 23">
+            <a:extLst>
+              <a:ext uri="{FF2B5EF4-FFF2-40B4-BE49-F238E27FC236}">
+                <a16:creationId xmlns:a16="http://schemas.microsoft.com/office/drawing/2014/main" id="{68967161-A904-D3EE-CA3F-ED25C455CF91}"/>
+              </a:ext>
+            </a:extLst>
+          </p:cNvPr>
+          <p:cNvSpPr txBox="1"/>
+          <p:nvPr/>
+        </p:nvSpPr>
+        <p:spPr>
+          <a:xfrm rot="133116">
+            <a:off x="7509471" y="3779701"/>
+            <a:ext cx="564824" cy="153888"/>
+          </a:xfrm>
+          <a:prstGeom prst="rect">
+            <a:avLst/>
+          </a:prstGeom>
+          <a:solidFill>
+            <a:schemeClr val="bg1"/>
+          </a:solidFill>
+        </p:spPr>
+        <p:txBody>
+          <a:bodyPr wrap="square" lIns="18000" rtlCol="0">
+            <a:spAutoFit/>
+          </a:bodyPr>
+          <a:lstStyle/>
+          <a:p>
+            <a:r>
+              <a:rPr lang="en-US" sz="400" dirty="0"/>
+              <a:t>Antigen binding</a:t>
+            </a:r>
+          </a:p>
+        </p:txBody>
+      </p:sp>
+      <p:sp>
+        <p:nvSpPr>
+          <p:cNvPr id="25" name="TextBox 24">
+            <a:extLst>
+              <a:ext uri="{FF2B5EF4-FFF2-40B4-BE49-F238E27FC236}">
+                <a16:creationId xmlns:a16="http://schemas.microsoft.com/office/drawing/2014/main" id="{1FD050EC-F1BE-6D13-D47C-4DB75541A0C9}"/>
+              </a:ext>
+            </a:extLst>
+          </p:cNvPr>
+          <p:cNvSpPr txBox="1"/>
+          <p:nvPr/>
+        </p:nvSpPr>
+        <p:spPr>
+          <a:xfrm rot="2559272">
+            <a:off x="7271713" y="4275831"/>
+            <a:ext cx="583811" cy="215444"/>
+          </a:xfrm>
+          <a:prstGeom prst="rect">
+            <a:avLst/>
+          </a:prstGeom>
+          <a:solidFill>
+            <a:schemeClr val="bg1"/>
+          </a:solidFill>
+        </p:spPr>
+        <p:txBody>
+          <a:bodyPr wrap="square" lIns="18000" rtlCol="0">
+            <a:spAutoFit/>
+          </a:bodyPr>
+          <a:lstStyle/>
+          <a:p>
+            <a:r>
+              <a:rPr lang="en-US" sz="400" dirty="0"/>
+              <a:t>T-cell receptor signaling</a:t>
+            </a:r>
+            <a:endParaRPr lang="en-TW" sz="400" dirty="0"/>
+          </a:p>
+        </p:txBody>
+      </p:sp>
+      <p:grpSp>
+        <p:nvGrpSpPr>
+          <p:cNvPr id="32" name="Group 31">
+            <a:extLst>
+              <a:ext uri="{FF2B5EF4-FFF2-40B4-BE49-F238E27FC236}">
+                <a16:creationId xmlns:a16="http://schemas.microsoft.com/office/drawing/2014/main" id="{093A793C-60F0-32B2-28A4-CCFB95F6D28E}"/>
+              </a:ext>
+            </a:extLst>
+          </p:cNvPr>
+          <p:cNvGrpSpPr/>
+          <p:nvPr/>
+        </p:nvGrpSpPr>
+        <p:grpSpPr>
+          <a:xfrm>
+            <a:off x="4702498" y="1996482"/>
+            <a:ext cx="1688387" cy="1531894"/>
+            <a:chOff x="4407613" y="1996482"/>
+            <a:chExt cx="1688387" cy="1531894"/>
+          </a:xfrm>
+        </p:grpSpPr>
+        <p:pic>
+          <p:nvPicPr>
+            <p:cNvPr id="29" name="Picture 28">
+              <a:extLst>
+                <a:ext uri="{FF2B5EF4-FFF2-40B4-BE49-F238E27FC236}">
+                  <a16:creationId xmlns:a16="http://schemas.microsoft.com/office/drawing/2014/main" id="{71B4A49C-F02B-E26A-4BFD-30554FF95249}"/>
+                </a:ext>
+              </a:extLst>
+            </p:cNvPr>
+            <p:cNvPicPr>
+              <a:picLocks noChangeAspect="1"/>
+            </p:cNvPicPr>
+            <p:nvPr/>
+          </p:nvPicPr>
+          <p:blipFill>
+            <a:blip r:embed="rId7"/>
+            <a:srcRect t="4948"/>
+            <a:stretch>
+              <a:fillRect/>
+            </a:stretch>
+          </p:blipFill>
+          <p:spPr>
+            <a:xfrm>
+              <a:off x="4407613" y="1996482"/>
+              <a:ext cx="1688387" cy="1531894"/>
+            </a:xfrm>
+            <a:prstGeom prst="rect">
+              <a:avLst/>
+            </a:prstGeom>
+          </p:spPr>
+        </p:pic>
+        <p:sp>
+          <p:nvSpPr>
+            <p:cNvPr id="30" name="Rectangle 29">
+              <a:extLst>
+                <a:ext uri="{FF2B5EF4-FFF2-40B4-BE49-F238E27FC236}">
+                  <a16:creationId xmlns:a16="http://schemas.microsoft.com/office/drawing/2014/main" id="{5AD64C3B-145A-979F-C273-46072366E1ED}"/>
+                </a:ext>
+              </a:extLst>
+            </p:cNvPr>
+            <p:cNvSpPr/>
+            <p:nvPr/>
+          </p:nvSpPr>
+          <p:spPr>
+            <a:xfrm>
+              <a:off x="5034261" y="1996482"/>
+              <a:ext cx="91103" cy="51639"/>
+            </a:xfrm>
+            <a:prstGeom prst="rect">
+              <a:avLst/>
+            </a:prstGeom>
+            <a:solidFill>
+              <a:schemeClr val="bg1"/>
+            </a:solidFill>
+            <a:ln>
+              <a:solidFill>
+                <a:schemeClr val="bg1"/>
+              </a:solidFill>
+            </a:ln>
+          </p:spPr>
+          <p:style>
+            <a:lnRef idx="2">
+              <a:schemeClr val="accent1">
+                <a:shade val="15000"/>
+              </a:schemeClr>
+            </a:lnRef>
+            <a:fillRef idx="1">
+              <a:schemeClr val="accent1"/>
+            </a:fillRef>
+            <a:effectRef idx="0">
+              <a:schemeClr val="accent1"/>
+            </a:effectRef>
+            <a:fontRef idx="minor">
+              <a:schemeClr val="lt1"/>
+            </a:fontRef>
+          </p:style>
+          <p:txBody>
+            <a:bodyPr rtlCol="0" anchor="ctr"/>
+            <a:lstStyle/>
+            <a:p>
+              <a:pPr algn="ctr"/>
+              <a:endParaRPr lang="en-TW"/>
+            </a:p>
+          </p:txBody>
+        </p:sp>
+        <p:sp>
+          <p:nvSpPr>
+            <p:cNvPr id="31" name="Rectangle 30">
+              <a:extLst>
+                <a:ext uri="{FF2B5EF4-FFF2-40B4-BE49-F238E27FC236}">
+                  <a16:creationId xmlns:a16="http://schemas.microsoft.com/office/drawing/2014/main" id="{49D4CA08-AAA4-F534-C761-E3F7E3252491}"/>
+                </a:ext>
+              </a:extLst>
+            </p:cNvPr>
+            <p:cNvSpPr/>
+            <p:nvPr/>
+          </p:nvSpPr>
+          <p:spPr>
+            <a:xfrm>
+              <a:off x="5706460" y="1996482"/>
+              <a:ext cx="91103" cy="51639"/>
+            </a:xfrm>
+            <a:prstGeom prst="rect">
+              <a:avLst/>
+            </a:prstGeom>
+            <a:solidFill>
+              <a:schemeClr val="bg1"/>
+            </a:solidFill>
+            <a:ln>
+              <a:solidFill>
+                <a:schemeClr val="bg1"/>
+              </a:solidFill>
+            </a:ln>
+          </p:spPr>
+          <p:style>
+            <a:lnRef idx="2">
+              <a:schemeClr val="accent1">
+                <a:shade val="15000"/>
+              </a:schemeClr>
+            </a:lnRef>
+            <a:fillRef idx="1">
+              <a:schemeClr val="accent1"/>
+            </a:fillRef>
+            <a:effectRef idx="0">
+              <a:schemeClr val="accent1"/>
+            </a:effectRef>
+            <a:fontRef idx="minor">
+              <a:schemeClr val="lt1"/>
+            </a:fontRef>
+          </p:style>
+          <p:txBody>
+            <a:bodyPr rtlCol="0" anchor="ctr"/>
+            <a:lstStyle/>
+            <a:p>
+              <a:pPr algn="ctr"/>
+              <a:endParaRPr lang="en-TW"/>
+            </a:p>
+          </p:txBody>
+        </p:sp>
+      </p:grpSp>
+      <p:sp>
+        <p:nvSpPr>
+          <p:cNvPr id="33" name="TextBox 32">
+            <a:extLst>
+              <a:ext uri="{FF2B5EF4-FFF2-40B4-BE49-F238E27FC236}">
+                <a16:creationId xmlns:a16="http://schemas.microsoft.com/office/drawing/2014/main" id="{BD4525DA-A5D9-8684-681A-586398F3CA4A}"/>
+              </a:ext>
+            </a:extLst>
+          </p:cNvPr>
+          <p:cNvSpPr txBox="1"/>
+          <p:nvPr/>
+        </p:nvSpPr>
+        <p:spPr>
+          <a:xfrm>
+            <a:off x="5476342" y="1515333"/>
+            <a:ext cx="2445901" cy="276999"/>
+          </a:xfrm>
+          <a:prstGeom prst="rect">
+            <a:avLst/>
+          </a:prstGeom>
+          <a:noFill/>
+        </p:spPr>
+        <p:txBody>
+          <a:bodyPr wrap="square" rtlCol="0">
+            <a:spAutoFit/>
+          </a:bodyPr>
+          <a:lstStyle/>
+          <a:p>
+            <a:pPr algn="r"/>
+            <a:r>
+              <a:rPr lang="en-TW" sz="1200" b="1" i="1" dirty="0">
+                <a:latin typeface="Arial" panose="020B0604020202020204" pitchFamily="34" charset="0"/>
+                <a:cs typeface="Arial" panose="020B0604020202020204" pitchFamily="34" charset="0"/>
+              </a:rPr>
+              <a:t>Functional Annotation</a:t>
+            </a:r>
+          </a:p>
+        </p:txBody>
+      </p:sp>
+      <p:cxnSp>
+        <p:nvCxnSpPr>
+          <p:cNvPr id="34" name="Straight Connector 33">
+            <a:extLst>
+              <a:ext uri="{FF2B5EF4-FFF2-40B4-BE49-F238E27FC236}">
+                <a16:creationId xmlns:a16="http://schemas.microsoft.com/office/drawing/2014/main" id="{F4C45285-61B2-3B90-6047-AB76509CC105}"/>
+              </a:ext>
+            </a:extLst>
+          </p:cNvPr>
+          <p:cNvCxnSpPr>
+            <a:cxnSpLocks/>
+          </p:cNvCxnSpPr>
+          <p:nvPr/>
+        </p:nvCxnSpPr>
+        <p:spPr>
+          <a:xfrm flipH="1">
+            <a:off x="4538340" y="1641720"/>
+            <a:ext cx="1641303" cy="9687"/>
+          </a:xfrm>
+          <a:prstGeom prst="line">
+            <a:avLst/>
+          </a:prstGeom>
+        </p:spPr>
+        <p:style>
+          <a:lnRef idx="2">
+            <a:schemeClr val="dk1"/>
+          </a:lnRef>
+          <a:fillRef idx="0">
+            <a:schemeClr val="dk1"/>
+          </a:fillRef>
+          <a:effectRef idx="1">
+            <a:schemeClr val="dk1"/>
+          </a:effectRef>
+          <a:fontRef idx="minor">
+            <a:schemeClr val="tx1"/>
+          </a:fontRef>
+        </p:style>
+      </p:cxnSp>
+      <p:sp>
+        <p:nvSpPr>
+          <p:cNvPr id="35" name="Oval 34">
+            <a:extLst>
+              <a:ext uri="{FF2B5EF4-FFF2-40B4-BE49-F238E27FC236}">
+                <a16:creationId xmlns:a16="http://schemas.microsoft.com/office/drawing/2014/main" id="{E5D45841-FA33-595D-CD87-9D6C0FACD6D0}"/>
+              </a:ext>
+            </a:extLst>
+          </p:cNvPr>
+          <p:cNvSpPr>
+            <a:spLocks noChangeAspect="1"/>
+          </p:cNvSpPr>
+          <p:nvPr/>
+        </p:nvSpPr>
+        <p:spPr>
+          <a:xfrm>
+            <a:off x="4517273" y="1633267"/>
+            <a:ext cx="36062" cy="36000"/>
+          </a:xfrm>
+          <a:prstGeom prst="ellipse">
+            <a:avLst/>
+          </a:prstGeom>
+          <a:solidFill>
+            <a:schemeClr val="tx1"/>
+          </a:solidFill>
+          <a:ln>
+            <a:solidFill>
+              <a:schemeClr val="tx1"/>
+            </a:solidFill>
+          </a:ln>
+        </p:spPr>
+        <p:style>
+          <a:lnRef idx="2">
+            <a:schemeClr val="accent1">
+              <a:shade val="15000"/>
+            </a:schemeClr>
+          </a:lnRef>
+          <a:fillRef idx="1">
+            <a:schemeClr val="accent1"/>
+          </a:fillRef>
+          <a:effectRef idx="0">
+            <a:schemeClr val="accent1"/>
+          </a:effectRef>
+          <a:fontRef idx="minor">
+            <a:schemeClr val="lt1"/>
+          </a:fontRef>
+        </p:style>
+        <p:txBody>
+          <a:bodyPr rtlCol="0" anchor="ctr"/>
+          <a:lstStyle/>
+          <a:p>
+            <a:pPr algn="ctr"/>
+            <a:endParaRPr lang="en-TW"/>
+          </a:p>
+        </p:txBody>
+      </p:sp>
+      <p:pic>
+        <p:nvPicPr>
+          <p:cNvPr id="39" name="Picture 38">
+            <a:extLst>
+              <a:ext uri="{FF2B5EF4-FFF2-40B4-BE49-F238E27FC236}">
+                <a16:creationId xmlns:a16="http://schemas.microsoft.com/office/drawing/2014/main" id="{D113947A-6C5F-7162-9461-3243E02E2A3A}"/>
+              </a:ext>
+            </a:extLst>
+          </p:cNvPr>
+          <p:cNvPicPr>
+            <a:picLocks noChangeAspect="1"/>
+          </p:cNvPicPr>
+          <p:nvPr/>
+        </p:nvPicPr>
+        <p:blipFill>
+          <a:blip r:embed="rId8"/>
+          <a:stretch>
+            <a:fillRect/>
+          </a:stretch>
+        </p:blipFill>
+        <p:spPr>
+          <a:xfrm>
+            <a:off x="6743587" y="5658084"/>
+            <a:ext cx="336543" cy="402140"/>
+          </a:xfrm>
+          <a:prstGeom prst="rect">
+            <a:avLst/>
+          </a:prstGeom>
+        </p:spPr>
+      </p:pic>
+      <p:sp>
+        <p:nvSpPr>
+          <p:cNvPr id="40" name="TextBox 39">
+            <a:extLst>
+              <a:ext uri="{FF2B5EF4-FFF2-40B4-BE49-F238E27FC236}">
+                <a16:creationId xmlns:a16="http://schemas.microsoft.com/office/drawing/2014/main" id="{24FD7484-239C-F8C8-EDA6-A92EA302E1AD}"/>
+              </a:ext>
+            </a:extLst>
+          </p:cNvPr>
+          <p:cNvSpPr txBox="1"/>
+          <p:nvPr/>
+        </p:nvSpPr>
+        <p:spPr>
+          <a:xfrm>
+            <a:off x="9102321" y="1521361"/>
+            <a:ext cx="2445901" cy="276999"/>
+          </a:xfrm>
+          <a:prstGeom prst="rect">
+            <a:avLst/>
+          </a:prstGeom>
+          <a:noFill/>
+        </p:spPr>
+        <p:txBody>
+          <a:bodyPr wrap="square" rtlCol="0">
+            <a:spAutoFit/>
+          </a:bodyPr>
+          <a:lstStyle/>
+          <a:p>
+            <a:pPr algn="r"/>
+            <a:r>
+              <a:rPr lang="en-TW" sz="1200" b="1" i="1" dirty="0">
+                <a:latin typeface="Arial" panose="020B0604020202020204" pitchFamily="34" charset="0"/>
+                <a:cs typeface="Arial" panose="020B0604020202020204" pitchFamily="34" charset="0"/>
+              </a:rPr>
+              <a:t>Mendelian Randomization</a:t>
+            </a:r>
+          </a:p>
+        </p:txBody>
+      </p:sp>
+      <p:sp>
+        <p:nvSpPr>
+          <p:cNvPr id="52" name="Trapezoid 51">
+            <a:extLst>
+              <a:ext uri="{FF2B5EF4-FFF2-40B4-BE49-F238E27FC236}">
+                <a16:creationId xmlns:a16="http://schemas.microsoft.com/office/drawing/2014/main" id="{2375D0EB-BEB4-F4F1-B530-63A88F2A0C18}"/>
+              </a:ext>
+            </a:extLst>
+          </p:cNvPr>
+          <p:cNvSpPr/>
+          <p:nvPr/>
+        </p:nvSpPr>
+        <p:spPr>
+          <a:xfrm rot="5400000">
+            <a:off x="2197563" y="3847886"/>
+            <a:ext cx="4294435" cy="272856"/>
+          </a:xfrm>
+          <a:prstGeom prst="trapezoid">
+            <a:avLst>
+              <a:gd name="adj" fmla="val 173895"/>
+            </a:avLst>
+          </a:prstGeom>
+          <a:solidFill>
+            <a:schemeClr val="bg1"/>
+          </a:solidFill>
+          <a:ln>
+            <a:solidFill>
+              <a:schemeClr val="tx1"/>
+            </a:solidFill>
+          </a:ln>
+        </p:spPr>
+        <p:style>
+          <a:lnRef idx="2">
+            <a:schemeClr val="accent1">
+              <a:shade val="15000"/>
+            </a:schemeClr>
+          </a:lnRef>
+          <a:fillRef idx="1">
+            <a:schemeClr val="accent1"/>
+          </a:fillRef>
+          <a:effectRef idx="0">
+            <a:schemeClr val="accent1"/>
+          </a:effectRef>
+          <a:fontRef idx="minor">
+            <a:schemeClr val="lt1"/>
+          </a:fontRef>
+        </p:style>
+        <p:txBody>
+          <a:bodyPr bIns="72000" rtlCol="0" anchor="ctr"/>
+          <a:lstStyle/>
+          <a:p>
+            <a:pPr algn="ctr"/>
+            <a:endParaRPr lang="en-TW" sz="1000" dirty="0">
+              <a:solidFill>
+                <a:schemeClr val="tx1"/>
+              </a:solidFill>
+              <a:latin typeface="Arial" panose="020B0604020202020204" pitchFamily="34" charset="0"/>
+              <a:cs typeface="Arial" panose="020B0604020202020204" pitchFamily="34" charset="0"/>
+            </a:endParaRPr>
+          </a:p>
+        </p:txBody>
+      </p:sp>
+      <p:cxnSp>
+        <p:nvCxnSpPr>
+          <p:cNvPr id="58" name="Straight Connector 57">
+            <a:extLst>
+              <a:ext uri="{FF2B5EF4-FFF2-40B4-BE49-F238E27FC236}">
+                <a16:creationId xmlns:a16="http://schemas.microsoft.com/office/drawing/2014/main" id="{D0020EFF-C599-19C0-2A16-F3653344D9B6}"/>
+              </a:ext>
+            </a:extLst>
+          </p:cNvPr>
+          <p:cNvCxnSpPr>
+            <a:cxnSpLocks/>
+          </p:cNvCxnSpPr>
+          <p:nvPr/>
+        </p:nvCxnSpPr>
+        <p:spPr>
+          <a:xfrm flipH="1">
+            <a:off x="8239129" y="1651407"/>
+            <a:ext cx="1303077" cy="0"/>
+          </a:xfrm>
+          <a:prstGeom prst="line">
+            <a:avLst/>
+          </a:prstGeom>
+        </p:spPr>
+        <p:style>
+          <a:lnRef idx="2">
+            <a:schemeClr val="dk1"/>
+          </a:lnRef>
+          <a:fillRef idx="0">
+            <a:schemeClr val="dk1"/>
+          </a:fillRef>
+          <a:effectRef idx="1">
+            <a:schemeClr val="dk1"/>
+          </a:effectRef>
+          <a:fontRef idx="minor">
+            <a:schemeClr val="tx1"/>
+          </a:fontRef>
+        </p:style>
+      </p:cxnSp>
+      <p:sp>
+        <p:nvSpPr>
+          <p:cNvPr id="59" name="Oval 58">
+            <a:extLst>
+              <a:ext uri="{FF2B5EF4-FFF2-40B4-BE49-F238E27FC236}">
+                <a16:creationId xmlns:a16="http://schemas.microsoft.com/office/drawing/2014/main" id="{41E55685-967A-0E2F-5407-3AC0F1317901}"/>
+              </a:ext>
+            </a:extLst>
+          </p:cNvPr>
+          <p:cNvSpPr>
+            <a:spLocks noChangeAspect="1"/>
+          </p:cNvSpPr>
+          <p:nvPr/>
+        </p:nvSpPr>
+        <p:spPr>
+          <a:xfrm>
+            <a:off x="8218062" y="1633267"/>
+            <a:ext cx="36062" cy="36000"/>
+          </a:xfrm>
+          <a:prstGeom prst="ellipse">
+            <a:avLst/>
+          </a:prstGeom>
+          <a:solidFill>
+            <a:schemeClr val="tx1"/>
+          </a:solidFill>
+          <a:ln>
+            <a:solidFill>
+              <a:schemeClr val="tx1"/>
+            </a:solidFill>
+          </a:ln>
+        </p:spPr>
+        <p:style>
+          <a:lnRef idx="2">
+            <a:schemeClr val="accent1">
+              <a:shade val="15000"/>
+            </a:schemeClr>
+          </a:lnRef>
+          <a:fillRef idx="1">
+            <a:schemeClr val="accent1"/>
+          </a:fillRef>
+          <a:effectRef idx="0">
+            <a:schemeClr val="accent1"/>
+          </a:effectRef>
+          <a:fontRef idx="minor">
+            <a:schemeClr val="lt1"/>
+          </a:fontRef>
+        </p:style>
+        <p:txBody>
+          <a:bodyPr rtlCol="0" anchor="ctr"/>
+          <a:lstStyle/>
+          <a:p>
+            <a:pPr algn="ctr"/>
+            <a:endParaRPr lang="en-TW"/>
+          </a:p>
+        </p:txBody>
+      </p:sp>
+      <p:pic>
+        <p:nvPicPr>
+          <p:cNvPr id="61" name="Picture 60">
+            <a:extLst>
+              <a:ext uri="{FF2B5EF4-FFF2-40B4-BE49-F238E27FC236}">
+                <a16:creationId xmlns:a16="http://schemas.microsoft.com/office/drawing/2014/main" id="{E02ECC9C-1548-0149-3772-F75A90DA386B}"/>
+              </a:ext>
+            </a:extLst>
+          </p:cNvPr>
+          <p:cNvPicPr>
+            <a:picLocks noChangeAspect="1"/>
+          </p:cNvPicPr>
+          <p:nvPr/>
+        </p:nvPicPr>
+        <p:blipFill>
+          <a:blip r:embed="rId9"/>
+          <a:srcRect l="8811"/>
+          <a:stretch>
+            <a:fillRect/>
+          </a:stretch>
+        </p:blipFill>
+        <p:spPr>
+          <a:xfrm>
+            <a:off x="8654395" y="4365612"/>
+            <a:ext cx="1303077" cy="1308387"/>
+          </a:xfrm>
+          <a:prstGeom prst="rect">
+            <a:avLst/>
+          </a:prstGeom>
+        </p:spPr>
+      </p:pic>
+      <p:pic>
+        <p:nvPicPr>
+          <p:cNvPr id="62" name="Picture 61">
+            <a:extLst>
+              <a:ext uri="{FF2B5EF4-FFF2-40B4-BE49-F238E27FC236}">
+                <a16:creationId xmlns:a16="http://schemas.microsoft.com/office/drawing/2014/main" id="{1F1B7F4F-F292-2031-BD01-0D7E82F15447}"/>
+              </a:ext>
+            </a:extLst>
+          </p:cNvPr>
+          <p:cNvPicPr>
+            <a:picLocks noChangeAspect="1"/>
+          </p:cNvPicPr>
+          <p:nvPr/>
+        </p:nvPicPr>
+        <p:blipFill>
+          <a:blip r:embed="rId9"/>
+          <a:srcRect l="8811"/>
+          <a:stretch>
+            <a:fillRect/>
+          </a:stretch>
+        </p:blipFill>
+        <p:spPr>
+          <a:xfrm>
+            <a:off x="10197496" y="4361295"/>
+            <a:ext cx="1303077" cy="1308387"/>
+          </a:xfrm>
+          <a:prstGeom prst="rect">
+            <a:avLst/>
+          </a:prstGeom>
+        </p:spPr>
+      </p:pic>
+      <p:sp>
+        <p:nvSpPr>
+          <p:cNvPr id="63" name="TextBox 62">
+            <a:extLst>
+              <a:ext uri="{FF2B5EF4-FFF2-40B4-BE49-F238E27FC236}">
+                <a16:creationId xmlns:a16="http://schemas.microsoft.com/office/drawing/2014/main" id="{59187C2A-AF6B-6FCC-53CA-A6136F708ECD}"/>
+              </a:ext>
+            </a:extLst>
+          </p:cNvPr>
+          <p:cNvSpPr txBox="1"/>
+          <p:nvPr/>
+        </p:nvSpPr>
+        <p:spPr>
+          <a:xfrm rot="16200000">
+            <a:off x="3512542" y="3775537"/>
+            <a:ext cx="1634480" cy="246221"/>
+          </a:xfrm>
+          <a:prstGeom prst="rect">
+            <a:avLst/>
+          </a:prstGeom>
+          <a:noFill/>
+        </p:spPr>
+        <p:txBody>
+          <a:bodyPr wrap="square" rtlCol="0">
+            <a:spAutoFit/>
+          </a:bodyPr>
+          <a:lstStyle/>
+          <a:p>
+            <a:pPr algn="ctr"/>
+            <a:r>
+              <a:rPr lang="en-TW" sz="1000" dirty="0">
+                <a:latin typeface="Arial" panose="020B0604020202020204" pitchFamily="34" charset="0"/>
+                <a:cs typeface="Arial" panose="020B0604020202020204" pitchFamily="34" charset="0"/>
+              </a:rPr>
+              <a:t>SNP-to-Gene mapping</a:t>
+            </a:r>
+          </a:p>
+        </p:txBody>
+      </p:sp>
+      <p:sp>
+        <p:nvSpPr>
+          <p:cNvPr id="64" name="TextBox 63">
+            <a:extLst>
+              <a:ext uri="{FF2B5EF4-FFF2-40B4-BE49-F238E27FC236}">
+                <a16:creationId xmlns:a16="http://schemas.microsoft.com/office/drawing/2014/main" id="{65E2108F-2EBC-4F99-BE87-D0E2E23A8426}"/>
+              </a:ext>
+            </a:extLst>
+          </p:cNvPr>
+          <p:cNvSpPr txBox="1"/>
+          <p:nvPr/>
+        </p:nvSpPr>
+        <p:spPr>
+          <a:xfrm rot="16200000">
+            <a:off x="7697642" y="4907766"/>
+            <a:ext cx="1634480" cy="215444"/>
+          </a:xfrm>
+          <a:prstGeom prst="rect">
+            <a:avLst/>
+          </a:prstGeom>
+          <a:noFill/>
+        </p:spPr>
+        <p:txBody>
+          <a:bodyPr wrap="square" rtlCol="0">
+            <a:spAutoFit/>
+          </a:bodyPr>
+          <a:lstStyle/>
+          <a:p>
+            <a:pPr algn="ctr"/>
+            <a:r>
+              <a:rPr lang="en-TW" sz="800" dirty="0">
+                <a:latin typeface="Arial" panose="020B0604020202020204" pitchFamily="34" charset="0"/>
+                <a:cs typeface="Arial" panose="020B0604020202020204" pitchFamily="34" charset="0"/>
+              </a:rPr>
+              <a:t>SNP effect on D</a:t>
+            </a:r>
+            <a:r>
+              <a:rPr lang="en-TW" sz="800" baseline="-25000" dirty="0">
+                <a:latin typeface="Arial" panose="020B0604020202020204" pitchFamily="34" charset="0"/>
+                <a:cs typeface="Arial" panose="020B0604020202020204" pitchFamily="34" charset="0"/>
+              </a:rPr>
+              <a:t>1</a:t>
+            </a:r>
+            <a:endParaRPr lang="en-TW" sz="800" dirty="0">
+              <a:latin typeface="Arial" panose="020B0604020202020204" pitchFamily="34" charset="0"/>
+              <a:cs typeface="Arial" panose="020B0604020202020204" pitchFamily="34" charset="0"/>
+            </a:endParaRPr>
+          </a:p>
+        </p:txBody>
+      </p:sp>
+      <p:sp>
+        <p:nvSpPr>
+          <p:cNvPr id="65" name="TextBox 64">
+            <a:extLst>
+              <a:ext uri="{FF2B5EF4-FFF2-40B4-BE49-F238E27FC236}">
+                <a16:creationId xmlns:a16="http://schemas.microsoft.com/office/drawing/2014/main" id="{E47007FC-77C5-1A79-0985-7677A5FAD234}"/>
+              </a:ext>
+            </a:extLst>
+          </p:cNvPr>
+          <p:cNvSpPr txBox="1"/>
+          <p:nvPr/>
+        </p:nvSpPr>
+        <p:spPr>
+          <a:xfrm rot="16200000">
+            <a:off x="9260243" y="4907766"/>
+            <a:ext cx="1634480" cy="215444"/>
+          </a:xfrm>
+          <a:prstGeom prst="rect">
+            <a:avLst/>
+          </a:prstGeom>
+          <a:noFill/>
+        </p:spPr>
+        <p:txBody>
+          <a:bodyPr wrap="square" rtlCol="0">
+            <a:spAutoFit/>
+          </a:bodyPr>
+          <a:lstStyle/>
+          <a:p>
+            <a:pPr algn="ctr"/>
+            <a:r>
+              <a:rPr lang="en-TW" sz="800" dirty="0">
+                <a:latin typeface="Arial" panose="020B0604020202020204" pitchFamily="34" charset="0"/>
+                <a:cs typeface="Arial" panose="020B0604020202020204" pitchFamily="34" charset="0"/>
+              </a:rPr>
+              <a:t>SNP effect on D</a:t>
+            </a:r>
+            <a:r>
+              <a:rPr lang="en-TW" sz="800" baseline="-25000" dirty="0">
+                <a:latin typeface="Arial" panose="020B0604020202020204" pitchFamily="34" charset="0"/>
+                <a:cs typeface="Arial" panose="020B0604020202020204" pitchFamily="34" charset="0"/>
+              </a:rPr>
+              <a:t>2</a:t>
+            </a:r>
+            <a:endParaRPr lang="en-TW" sz="800" dirty="0">
+              <a:latin typeface="Arial" panose="020B0604020202020204" pitchFamily="34" charset="0"/>
+              <a:cs typeface="Arial" panose="020B0604020202020204" pitchFamily="34" charset="0"/>
+            </a:endParaRPr>
+          </a:p>
+        </p:txBody>
+      </p:sp>
+      <p:sp>
+        <p:nvSpPr>
+          <p:cNvPr id="66" name="TextBox 65">
+            <a:extLst>
+              <a:ext uri="{FF2B5EF4-FFF2-40B4-BE49-F238E27FC236}">
+                <a16:creationId xmlns:a16="http://schemas.microsoft.com/office/drawing/2014/main" id="{349B8F85-2F18-99DD-24EC-9586DDB13B5C}"/>
+              </a:ext>
+            </a:extLst>
+          </p:cNvPr>
+          <p:cNvSpPr txBox="1"/>
+          <p:nvPr/>
+        </p:nvSpPr>
+        <p:spPr>
+          <a:xfrm>
+            <a:off x="8488693" y="5665873"/>
+            <a:ext cx="1634480" cy="215444"/>
+          </a:xfrm>
+          <a:prstGeom prst="rect">
+            <a:avLst/>
+          </a:prstGeom>
+          <a:noFill/>
+        </p:spPr>
+        <p:txBody>
+          <a:bodyPr wrap="square" rtlCol="0">
+            <a:spAutoFit/>
+          </a:bodyPr>
+          <a:lstStyle/>
+          <a:p>
+            <a:pPr algn="ctr"/>
+            <a:r>
+              <a:rPr lang="en-TW" sz="800" dirty="0">
+                <a:latin typeface="Arial" panose="020B0604020202020204" pitchFamily="34" charset="0"/>
+                <a:cs typeface="Arial" panose="020B0604020202020204" pitchFamily="34" charset="0"/>
+              </a:rPr>
+              <a:t>SNP effect on D</a:t>
+            </a:r>
+            <a:r>
+              <a:rPr lang="en-TW" sz="800" baseline="-25000" dirty="0">
+                <a:latin typeface="Arial" panose="020B0604020202020204" pitchFamily="34" charset="0"/>
+                <a:cs typeface="Arial" panose="020B0604020202020204" pitchFamily="34" charset="0"/>
+              </a:rPr>
+              <a:t>2</a:t>
+            </a:r>
+            <a:endParaRPr lang="en-TW" sz="800" dirty="0">
+              <a:latin typeface="Arial" panose="020B0604020202020204" pitchFamily="34" charset="0"/>
+              <a:cs typeface="Arial" panose="020B0604020202020204" pitchFamily="34" charset="0"/>
+            </a:endParaRPr>
+          </a:p>
+        </p:txBody>
+      </p:sp>
+      <p:sp>
+        <p:nvSpPr>
+          <p:cNvPr id="67" name="TextBox 66">
+            <a:extLst>
+              <a:ext uri="{FF2B5EF4-FFF2-40B4-BE49-F238E27FC236}">
+                <a16:creationId xmlns:a16="http://schemas.microsoft.com/office/drawing/2014/main" id="{86DC3228-E306-37BB-7B6B-23C37E4A1649}"/>
+              </a:ext>
+            </a:extLst>
+          </p:cNvPr>
+          <p:cNvSpPr txBox="1"/>
+          <p:nvPr/>
+        </p:nvSpPr>
+        <p:spPr>
+          <a:xfrm>
+            <a:off x="10033344" y="5665872"/>
+            <a:ext cx="1634480" cy="215444"/>
+          </a:xfrm>
+          <a:prstGeom prst="rect">
+            <a:avLst/>
+          </a:prstGeom>
+          <a:noFill/>
+        </p:spPr>
+        <p:txBody>
+          <a:bodyPr wrap="square" rtlCol="0">
+            <a:spAutoFit/>
+          </a:bodyPr>
+          <a:lstStyle/>
+          <a:p>
+            <a:pPr algn="ctr"/>
+            <a:r>
+              <a:rPr lang="en-TW" sz="800" dirty="0">
+                <a:latin typeface="Arial" panose="020B0604020202020204" pitchFamily="34" charset="0"/>
+                <a:cs typeface="Arial" panose="020B0604020202020204" pitchFamily="34" charset="0"/>
+              </a:rPr>
+              <a:t>SNP effect on D</a:t>
+            </a:r>
+            <a:r>
+              <a:rPr lang="en-TW" sz="800" baseline="-25000" dirty="0">
+                <a:latin typeface="Arial" panose="020B0604020202020204" pitchFamily="34" charset="0"/>
+                <a:cs typeface="Arial" panose="020B0604020202020204" pitchFamily="34" charset="0"/>
+              </a:rPr>
+              <a:t>1</a:t>
+            </a:r>
+            <a:endParaRPr lang="en-TW" sz="800" dirty="0">
+              <a:latin typeface="Arial" panose="020B0604020202020204" pitchFamily="34" charset="0"/>
+              <a:cs typeface="Arial" panose="020B0604020202020204" pitchFamily="34" charset="0"/>
+            </a:endParaRPr>
+          </a:p>
+        </p:txBody>
+      </p:sp>
+      <p:sp>
+        <p:nvSpPr>
+          <p:cNvPr id="1054" name="Trapezoid 1053">
+            <a:extLst>
+              <a:ext uri="{FF2B5EF4-FFF2-40B4-BE49-F238E27FC236}">
+                <a16:creationId xmlns:a16="http://schemas.microsoft.com/office/drawing/2014/main" id="{C262FECF-0DCE-2195-D83D-2023638EF9FD}"/>
+              </a:ext>
+            </a:extLst>
+          </p:cNvPr>
+          <p:cNvSpPr/>
+          <p:nvPr/>
+        </p:nvSpPr>
+        <p:spPr>
+          <a:xfrm rot="5400000">
+            <a:off x="6018166" y="3847886"/>
+            <a:ext cx="4294435" cy="272856"/>
+          </a:xfrm>
+          <a:prstGeom prst="trapezoid">
+            <a:avLst>
+              <a:gd name="adj" fmla="val 173895"/>
+            </a:avLst>
+          </a:prstGeom>
+          <a:solidFill>
+            <a:schemeClr val="bg1"/>
+          </a:solidFill>
+          <a:ln>
+            <a:solidFill>
+              <a:schemeClr val="tx1"/>
+            </a:solidFill>
+          </a:ln>
+        </p:spPr>
+        <p:style>
+          <a:lnRef idx="2">
+            <a:schemeClr val="accent1">
+              <a:shade val="15000"/>
+            </a:schemeClr>
+          </a:lnRef>
+          <a:fillRef idx="1">
+            <a:schemeClr val="accent1"/>
+          </a:fillRef>
+          <a:effectRef idx="0">
+            <a:schemeClr val="accent1"/>
+          </a:effectRef>
+          <a:fontRef idx="minor">
+            <a:schemeClr val="lt1"/>
+          </a:fontRef>
+        </p:style>
+        <p:txBody>
+          <a:bodyPr bIns="72000" rtlCol="0" anchor="ctr"/>
+          <a:lstStyle/>
+          <a:p>
+            <a:pPr algn="ctr"/>
+            <a:endParaRPr lang="en-TW" sz="1000" dirty="0">
+              <a:solidFill>
+                <a:schemeClr val="tx1"/>
+              </a:solidFill>
+              <a:latin typeface="Arial" panose="020B0604020202020204" pitchFamily="34" charset="0"/>
+              <a:cs typeface="Arial" panose="020B0604020202020204" pitchFamily="34" charset="0"/>
+            </a:endParaRPr>
+          </a:p>
+        </p:txBody>
+      </p:sp>
+      <p:sp>
+        <p:nvSpPr>
+          <p:cNvPr id="1055" name="TextBox 1054">
+            <a:extLst>
+              <a:ext uri="{FF2B5EF4-FFF2-40B4-BE49-F238E27FC236}">
+                <a16:creationId xmlns:a16="http://schemas.microsoft.com/office/drawing/2014/main" id="{E44F55DA-927F-9BDA-E92E-A8706F063049}"/>
+              </a:ext>
+            </a:extLst>
+          </p:cNvPr>
+          <p:cNvSpPr txBox="1"/>
+          <p:nvPr/>
+        </p:nvSpPr>
+        <p:spPr>
+          <a:xfrm rot="16200000">
+            <a:off x="7333145" y="3775537"/>
+            <a:ext cx="1634480" cy="246221"/>
+          </a:xfrm>
+          <a:prstGeom prst="rect">
+            <a:avLst/>
+          </a:prstGeom>
+          <a:noFill/>
+        </p:spPr>
+        <p:txBody>
+          <a:bodyPr wrap="square" rtlCol="0">
+            <a:spAutoFit/>
+          </a:bodyPr>
+          <a:lstStyle/>
+          <a:p>
+            <a:pPr algn="ctr"/>
+            <a:r>
+              <a:rPr lang="en-TW" sz="1000" dirty="0">
+                <a:latin typeface="Arial" panose="020B0604020202020204" pitchFamily="34" charset="0"/>
+                <a:cs typeface="Arial" panose="020B0604020202020204" pitchFamily="34" charset="0"/>
+              </a:rPr>
+              <a:t>SNP-to-Gene mapping</a:t>
+            </a:r>
+          </a:p>
+        </p:txBody>
+      </p:sp>
+      <p:pic>
+        <p:nvPicPr>
+          <p:cNvPr id="1065" name="Picture 1064">
+            <a:extLst>
+              <a:ext uri="{FF2B5EF4-FFF2-40B4-BE49-F238E27FC236}">
+                <a16:creationId xmlns:a16="http://schemas.microsoft.com/office/drawing/2014/main" id="{0F9D3CBE-884B-A7AA-8650-49D300ECED48}"/>
+              </a:ext>
+            </a:extLst>
+          </p:cNvPr>
+          <p:cNvPicPr>
+            <a:picLocks noChangeAspect="1"/>
+          </p:cNvPicPr>
+          <p:nvPr/>
+        </p:nvPicPr>
+        <p:blipFill>
+          <a:blip r:embed="rId10"/>
+          <a:stretch>
+            <a:fillRect/>
+          </a:stretch>
+        </p:blipFill>
+        <p:spPr>
+          <a:xfrm>
+            <a:off x="8509920" y="2140814"/>
+            <a:ext cx="3135125" cy="2037831"/>
+          </a:xfrm>
+          <a:prstGeom prst="rect">
+            <a:avLst/>
+          </a:prstGeom>
+        </p:spPr>
+      </p:pic>
+      <p:sp>
+        <p:nvSpPr>
+          <p:cNvPr id="1066" name="TextBox 1065">
+            <a:extLst>
+              <a:ext uri="{FF2B5EF4-FFF2-40B4-BE49-F238E27FC236}">
+                <a16:creationId xmlns:a16="http://schemas.microsoft.com/office/drawing/2014/main" id="{1E6D7C84-C201-726B-4BB8-C999827D1D30}"/>
+              </a:ext>
+            </a:extLst>
+          </p:cNvPr>
+          <p:cNvSpPr txBox="1"/>
+          <p:nvPr/>
+        </p:nvSpPr>
+        <p:spPr>
+          <a:xfrm>
+            <a:off x="9560272" y="3438511"/>
+            <a:ext cx="330718" cy="318924"/>
+          </a:xfrm>
+          <a:prstGeom prst="rect">
+            <a:avLst/>
+          </a:prstGeom>
+          <a:solidFill>
+            <a:schemeClr val="bg1"/>
+          </a:solidFill>
+        </p:spPr>
+        <p:txBody>
+          <a:bodyPr wrap="square" lIns="0" tIns="36000" rIns="0" bIns="36000" rtlCol="0">
+            <a:spAutoFit/>
+          </a:bodyPr>
+          <a:lstStyle/>
+          <a:p>
+            <a:pPr algn="ctr"/>
+            <a:r>
+              <a:rPr lang="en-TW" sz="1600" b="1" dirty="0">
+                <a:latin typeface="Arial" panose="020B0604020202020204" pitchFamily="34" charset="0"/>
+                <a:cs typeface="Arial" panose="020B0604020202020204" pitchFamily="34" charset="0"/>
+              </a:rPr>
+              <a:t>D</a:t>
+            </a:r>
+            <a:r>
+              <a:rPr lang="en-TW" sz="1600" b="1" baseline="-25000" dirty="0">
+                <a:latin typeface="Arial" panose="020B0604020202020204" pitchFamily="34" charset="0"/>
+                <a:cs typeface="Arial" panose="020B0604020202020204" pitchFamily="34" charset="0"/>
+              </a:rPr>
+              <a:t>1</a:t>
+            </a:r>
+            <a:endParaRPr lang="en-TW" sz="1600" b="1" dirty="0">
+              <a:latin typeface="Arial" panose="020B0604020202020204" pitchFamily="34" charset="0"/>
+              <a:cs typeface="Arial" panose="020B0604020202020204" pitchFamily="34" charset="0"/>
+            </a:endParaRPr>
+          </a:p>
+        </p:txBody>
+      </p:sp>
+      <p:sp>
+        <p:nvSpPr>
+          <p:cNvPr id="1067" name="TextBox 1066">
+            <a:extLst>
+              <a:ext uri="{FF2B5EF4-FFF2-40B4-BE49-F238E27FC236}">
+                <a16:creationId xmlns:a16="http://schemas.microsoft.com/office/drawing/2014/main" id="{A20E786C-DCB1-ADF3-F626-007F97AA902F}"/>
+              </a:ext>
+            </a:extLst>
+          </p:cNvPr>
+          <p:cNvSpPr txBox="1"/>
+          <p:nvPr/>
+        </p:nvSpPr>
+        <p:spPr>
+          <a:xfrm>
+            <a:off x="10745159" y="3429000"/>
+            <a:ext cx="330718" cy="318924"/>
+          </a:xfrm>
+          <a:prstGeom prst="rect">
+            <a:avLst/>
+          </a:prstGeom>
+          <a:solidFill>
+            <a:schemeClr val="bg1"/>
+          </a:solidFill>
+        </p:spPr>
+        <p:txBody>
+          <a:bodyPr wrap="square" lIns="0" tIns="36000" rIns="0" bIns="36000" rtlCol="0">
+            <a:spAutoFit/>
+          </a:bodyPr>
+          <a:lstStyle/>
+          <a:p>
+            <a:pPr algn="ctr"/>
+            <a:r>
+              <a:rPr lang="en-TW" sz="1600" b="1" dirty="0">
+                <a:latin typeface="Arial" panose="020B0604020202020204" pitchFamily="34" charset="0"/>
+                <a:cs typeface="Arial" panose="020B0604020202020204" pitchFamily="34" charset="0"/>
+              </a:rPr>
+              <a:t>D</a:t>
+            </a:r>
+            <a:r>
+              <a:rPr lang="en-TW" sz="1600" b="1" baseline="-25000" dirty="0">
+                <a:latin typeface="Arial" panose="020B0604020202020204" pitchFamily="34" charset="0"/>
+                <a:cs typeface="Arial" panose="020B0604020202020204" pitchFamily="34" charset="0"/>
+              </a:rPr>
+              <a:t>2</a:t>
+            </a:r>
+            <a:endParaRPr lang="en-TW" sz="1600" b="1" dirty="0">
+              <a:latin typeface="Arial" panose="020B0604020202020204" pitchFamily="34" charset="0"/>
+              <a:cs typeface="Arial" panose="020B0604020202020204" pitchFamily="34" charset="0"/>
+            </a:endParaRPr>
+          </a:p>
+        </p:txBody>
+      </p:sp>
+      <p:sp>
+        <p:nvSpPr>
+          <p:cNvPr id="1068" name="TextBox 1067">
+            <a:extLst>
+              <a:ext uri="{FF2B5EF4-FFF2-40B4-BE49-F238E27FC236}">
+                <a16:creationId xmlns:a16="http://schemas.microsoft.com/office/drawing/2014/main" id="{A926BB31-2C53-8A0B-2D91-2EE239A15664}"/>
+              </a:ext>
+            </a:extLst>
+          </p:cNvPr>
+          <p:cNvSpPr txBox="1"/>
+          <p:nvPr/>
+        </p:nvSpPr>
+        <p:spPr>
+          <a:xfrm>
+            <a:off x="8430508" y="3362494"/>
+            <a:ext cx="330718" cy="318924"/>
+          </a:xfrm>
+          <a:prstGeom prst="rect">
+            <a:avLst/>
+          </a:prstGeom>
+          <a:solidFill>
+            <a:schemeClr val="bg1"/>
+          </a:solidFill>
+        </p:spPr>
+        <p:txBody>
+          <a:bodyPr wrap="square" lIns="0" tIns="36000" rIns="0" bIns="36000" rtlCol="0">
+            <a:spAutoFit/>
+          </a:bodyPr>
+          <a:lstStyle/>
+          <a:p>
+            <a:pPr algn="ctr"/>
+            <a:r>
+              <a:rPr lang="en-TW" sz="1600" b="1" dirty="0">
+                <a:latin typeface="Arial" panose="020B0604020202020204" pitchFamily="34" charset="0"/>
+                <a:cs typeface="Arial" panose="020B0604020202020204" pitchFamily="34" charset="0"/>
+              </a:rPr>
+              <a:t>IV</a:t>
+            </a:r>
+          </a:p>
+        </p:txBody>
+      </p:sp>
+      <p:sp>
+        <p:nvSpPr>
+          <p:cNvPr id="1069" name="TextBox 1068">
+            <a:extLst>
+              <a:ext uri="{FF2B5EF4-FFF2-40B4-BE49-F238E27FC236}">
+                <a16:creationId xmlns:a16="http://schemas.microsoft.com/office/drawing/2014/main" id="{F5C81FF6-8DBA-8708-CA91-6A8AACC796CB}"/>
+              </a:ext>
+            </a:extLst>
+          </p:cNvPr>
+          <p:cNvSpPr txBox="1"/>
+          <p:nvPr/>
+        </p:nvSpPr>
+        <p:spPr>
+          <a:xfrm>
+            <a:off x="10764099" y="3953267"/>
+            <a:ext cx="832168" cy="215444"/>
+          </a:xfrm>
+          <a:prstGeom prst="rect">
+            <a:avLst/>
+          </a:prstGeom>
+          <a:noFill/>
+        </p:spPr>
+        <p:txBody>
+          <a:bodyPr wrap="square" rtlCol="0">
+            <a:spAutoFit/>
+          </a:bodyPr>
+          <a:lstStyle/>
+          <a:p>
+            <a:pPr algn="ctr"/>
+            <a:r>
+              <a:rPr lang="en-TW" sz="800" dirty="0">
+                <a:solidFill>
+                  <a:schemeClr val="bg1">
+                    <a:lumMod val="65000"/>
+                  </a:schemeClr>
+                </a:solidFill>
+                <a:latin typeface="Arial" panose="020B0604020202020204" pitchFamily="34" charset="0"/>
+                <a:cs typeface="Arial" panose="020B0604020202020204" pitchFamily="34" charset="0"/>
+              </a:rPr>
+              <a:t>x 6 directions</a:t>
+            </a:r>
+          </a:p>
+        </p:txBody>
+      </p:sp>
+    </p:spTree>
+    <p:extLst>
+      <p:ext uri="{BB962C8B-B14F-4D97-AF65-F5344CB8AC3E}">
+        <p14:creationId xmlns:p14="http://schemas.microsoft.com/office/powerpoint/2010/main" val="790247795"/>
+      </p:ext>
+    </p:extLst>
+  </p:cSld>
+  <p:clrMapOvr>
+    <a:masterClrMapping/>
+  </p:clrMapOvr>
+</p:sld>
+</file>
+
+<file path=ppt/slides/slide2.xml><?xml version="1.0" encoding="utf-8"?>
+<p:sld xmlns:a="http://schemas.openxmlformats.org/drawingml/2006/main" xmlns:r="http://schemas.openxmlformats.org/officeDocument/2006/relationships" xmlns:p="http://schemas.openxmlformats.org/presentationml/2006/main">
+  <p:cSld>
+    <p:spTree>
+      <p:nvGrpSpPr>
+        <p:cNvPr id="1" name=""/>
+        <p:cNvGrpSpPr/>
+        <p:nvPr/>
+      </p:nvGrpSpPr>
+      <p:grpSpPr>
+        <a:xfrm>
+          <a:off x="0" y="0"/>
+          <a:ext cx="0" cy="0"/>
+          <a:chOff x="0" y="0"/>
+          <a:chExt cx="0" cy="0"/>
+        </a:xfrm>
+      </p:grpSpPr>
+      <p:pic>
+        <p:nvPicPr>
+          <p:cNvPr id="2" name="Picture 1">
+            <a:extLst>
+              <a:ext uri="{FF2B5EF4-FFF2-40B4-BE49-F238E27FC236}">
+                <a16:creationId xmlns:a16="http://schemas.microsoft.com/office/drawing/2014/main" id="{76732CFC-8CF5-03BC-898F-A3BBC71996C7}"/>
+              </a:ext>
+            </a:extLst>
+          </p:cNvPr>
+          <p:cNvPicPr>
+            <a:picLocks noChangeAspect="1"/>
+          </p:cNvPicPr>
+          <p:nvPr/>
+        </p:nvPicPr>
+        <p:blipFill>
+          <a:blip r:embed="rId2">
+            <a:alphaModFix amt="35000"/>
+          </a:blip>
+          <a:stretch>
+            <a:fillRect/>
+          </a:stretch>
+        </p:blipFill>
+        <p:spPr>
+          <a:xfrm>
+            <a:off x="9969331" y="2758544"/>
+            <a:ext cx="521506" cy="590900"/>
+          </a:xfrm>
+          <a:prstGeom prst="rect">
+            <a:avLst/>
+          </a:prstGeom>
+        </p:spPr>
+      </p:pic>
+      <p:cxnSp>
+        <p:nvCxnSpPr>
+          <p:cNvPr id="3" name="Straight Connector 2">
+            <a:extLst>
+              <a:ext uri="{FF2B5EF4-FFF2-40B4-BE49-F238E27FC236}">
+                <a16:creationId xmlns:a16="http://schemas.microsoft.com/office/drawing/2014/main" id="{9F7899C0-56A0-E3C8-4176-5DBBF34249F3}"/>
+              </a:ext>
+            </a:extLst>
+          </p:cNvPr>
+          <p:cNvCxnSpPr>
+            <a:cxnSpLocks/>
+            <a:stCxn id="7" idx="5"/>
+          </p:cNvCxnSpPr>
+          <p:nvPr/>
+        </p:nvCxnSpPr>
+        <p:spPr>
+          <a:xfrm>
+            <a:off x="10496049" y="2229027"/>
+            <a:ext cx="714047" cy="612762"/>
+          </a:xfrm>
+          <a:prstGeom prst="line">
+            <a:avLst/>
+          </a:prstGeom>
+          <a:ln w="19050" cap="flat" cmpd="sng" algn="ctr">
+            <a:solidFill>
+              <a:schemeClr val="bg1">
+                <a:lumMod val="75000"/>
+              </a:schemeClr>
+            </a:solidFill>
+            <a:prstDash val="dash"/>
+            <a:round/>
+            <a:headEnd type="none" w="med" len="med"/>
+            <a:tailEnd type="none" w="med" len="med"/>
+          </a:ln>
+        </p:spPr>
+        <p:style>
+          <a:lnRef idx="0">
+            <a:scrgbClr r="0" g="0" b="0"/>
+          </a:lnRef>
+          <a:fillRef idx="0">
+            <a:scrgbClr r="0" g="0" b="0"/>
+          </a:fillRef>
+          <a:effectRef idx="0">
+            <a:scrgbClr r="0" g="0" b="0"/>
+          </a:effectRef>
+          <a:fontRef idx="minor">
+            <a:schemeClr val="tx1"/>
+          </a:fontRef>
+        </p:style>
+      </p:cxnSp>
+      <p:sp>
+        <p:nvSpPr>
+          <p:cNvPr id="4" name="TextBox 3">
+            <a:extLst>
+              <a:ext uri="{FF2B5EF4-FFF2-40B4-BE49-F238E27FC236}">
+                <a16:creationId xmlns:a16="http://schemas.microsoft.com/office/drawing/2014/main" id="{6431FE0A-4629-0D1D-2A4D-5A1896B50B9D}"/>
+              </a:ext>
+            </a:extLst>
+          </p:cNvPr>
+          <p:cNvSpPr txBox="1"/>
+          <p:nvPr/>
+        </p:nvSpPr>
+        <p:spPr>
+          <a:xfrm>
+            <a:off x="9780515" y="2049194"/>
+            <a:ext cx="761546" cy="215444"/>
+          </a:xfrm>
+          <a:prstGeom prst="rect">
+            <a:avLst/>
+          </a:prstGeom>
+          <a:noFill/>
+        </p:spPr>
+        <p:txBody>
+          <a:bodyPr wrap="square" rtlCol="0">
+            <a:spAutoFit/>
+          </a:bodyPr>
+          <a:lstStyle/>
+          <a:p>
+            <a:pPr algn="ctr"/>
+            <a:r>
+              <a:rPr lang="en-TW" sz="800" dirty="0">
+                <a:latin typeface="Arial" panose="020B0604020202020204" pitchFamily="34" charset="0"/>
+                <a:cs typeface="Arial" panose="020B0604020202020204" pitchFamily="34" charset="0"/>
+              </a:rPr>
+              <a:t>Confonders</a:t>
+            </a:r>
+          </a:p>
+        </p:txBody>
+      </p:sp>
+      <p:cxnSp>
+        <p:nvCxnSpPr>
+          <p:cNvPr id="5" name="Straight Arrow Connector 4">
+            <a:extLst>
+              <a:ext uri="{FF2B5EF4-FFF2-40B4-BE49-F238E27FC236}">
+                <a16:creationId xmlns:a16="http://schemas.microsoft.com/office/drawing/2014/main" id="{322BE186-3CD5-D330-635D-DC6322C4722A}"/>
+              </a:ext>
+            </a:extLst>
+          </p:cNvPr>
+          <p:cNvCxnSpPr>
+            <a:cxnSpLocks/>
+            <a:endCxn id="9" idx="1"/>
+          </p:cNvCxnSpPr>
+          <p:nvPr/>
+        </p:nvCxnSpPr>
+        <p:spPr>
+          <a:xfrm>
+            <a:off x="9219235" y="3127000"/>
+            <a:ext cx="340717" cy="7299"/>
+          </a:xfrm>
+          <a:prstGeom prst="straightConnector1">
+            <a:avLst/>
+          </a:prstGeom>
+          <a:ln w="38100">
+            <a:solidFill>
+              <a:schemeClr val="tx1"/>
+            </a:solidFill>
+            <a:tailEnd type="triangle"/>
+          </a:ln>
+        </p:spPr>
+        <p:style>
+          <a:lnRef idx="2">
+            <a:schemeClr val="dk1"/>
+          </a:lnRef>
+          <a:fillRef idx="0">
+            <a:schemeClr val="dk1"/>
+          </a:fillRef>
+          <a:effectRef idx="1">
+            <a:schemeClr val="dk1"/>
+          </a:effectRef>
+          <a:fontRef idx="minor">
+            <a:schemeClr val="tx1"/>
+          </a:fontRef>
+        </p:style>
+      </p:cxnSp>
+      <p:cxnSp>
+        <p:nvCxnSpPr>
+          <p:cNvPr id="6" name="Straight Connector 5">
+            <a:extLst>
+              <a:ext uri="{FF2B5EF4-FFF2-40B4-BE49-F238E27FC236}">
+                <a16:creationId xmlns:a16="http://schemas.microsoft.com/office/drawing/2014/main" id="{A9523E37-A02F-470F-F7AC-049F12B19D10}"/>
+              </a:ext>
+            </a:extLst>
+          </p:cNvPr>
+          <p:cNvCxnSpPr>
+            <a:cxnSpLocks/>
+            <a:endCxn id="7" idx="3"/>
+          </p:cNvCxnSpPr>
+          <p:nvPr/>
+        </p:nvCxnSpPr>
+        <p:spPr>
+          <a:xfrm flipV="1">
+            <a:off x="9101987" y="2229027"/>
+            <a:ext cx="709336" cy="573249"/>
+          </a:xfrm>
+          <a:prstGeom prst="line">
+            <a:avLst/>
+          </a:prstGeom>
+          <a:ln w="19050" cap="flat" cmpd="sng" algn="ctr">
+            <a:solidFill>
+              <a:schemeClr val="bg1">
+                <a:lumMod val="75000"/>
+              </a:schemeClr>
+            </a:solidFill>
+            <a:prstDash val="dash"/>
+            <a:round/>
+            <a:headEnd type="none" w="med" len="med"/>
+            <a:tailEnd type="none" w="med" len="med"/>
+          </a:ln>
+        </p:spPr>
+        <p:style>
+          <a:lnRef idx="0">
+            <a:scrgbClr r="0" g="0" b="0"/>
+          </a:lnRef>
+          <a:fillRef idx="0">
+            <a:scrgbClr r="0" g="0" b="0"/>
+          </a:fillRef>
+          <a:effectRef idx="0">
+            <a:scrgbClr r="0" g="0" b="0"/>
+          </a:effectRef>
+          <a:fontRef idx="minor">
+            <a:schemeClr val="tx1"/>
+          </a:fontRef>
+        </p:style>
+      </p:cxnSp>
+      <p:sp>
+        <p:nvSpPr>
+          <p:cNvPr id="7" name="Oval 6">
+            <a:extLst>
+              <a:ext uri="{FF2B5EF4-FFF2-40B4-BE49-F238E27FC236}">
+                <a16:creationId xmlns:a16="http://schemas.microsoft.com/office/drawing/2014/main" id="{B1C83B0F-FC32-639A-3F7D-DB402C9B6614}"/>
+              </a:ext>
+            </a:extLst>
+          </p:cNvPr>
+          <p:cNvSpPr/>
+          <p:nvPr/>
+        </p:nvSpPr>
+        <p:spPr>
+          <a:xfrm>
+            <a:off x="9669511" y="2045135"/>
+            <a:ext cx="968350" cy="215443"/>
+          </a:xfrm>
+          <a:prstGeom prst="ellipse">
+            <a:avLst/>
+          </a:prstGeom>
+          <a:noFill/>
+          <a:ln>
+            <a:solidFill>
+              <a:schemeClr val="bg1">
+                <a:lumMod val="75000"/>
+              </a:schemeClr>
+            </a:solidFill>
+          </a:ln>
+        </p:spPr>
+        <p:style>
+          <a:lnRef idx="2">
+            <a:schemeClr val="accent1">
+              <a:shade val="15000"/>
+            </a:schemeClr>
+          </a:lnRef>
+          <a:fillRef idx="1">
+            <a:schemeClr val="accent1"/>
+          </a:fillRef>
+          <a:effectRef idx="0">
+            <a:schemeClr val="accent1"/>
+          </a:effectRef>
+          <a:fontRef idx="minor">
+            <a:schemeClr val="lt1"/>
+          </a:fontRef>
+        </p:style>
+        <p:txBody>
+          <a:bodyPr rtlCol="0" anchor="ctr"/>
+          <a:lstStyle/>
+          <a:p>
+            <a:pPr algn="ctr"/>
+            <a:endParaRPr lang="en-TW"/>
+          </a:p>
+        </p:txBody>
+      </p:sp>
+      <p:pic>
+        <p:nvPicPr>
+          <p:cNvPr id="8" name="Picture 7">
+            <a:extLst>
+              <a:ext uri="{FF2B5EF4-FFF2-40B4-BE49-F238E27FC236}">
+                <a16:creationId xmlns:a16="http://schemas.microsoft.com/office/drawing/2014/main" id="{815DEA04-68FF-85DD-F5F9-3ACA7D88D744}"/>
+              </a:ext>
+            </a:extLst>
+          </p:cNvPr>
+          <p:cNvPicPr>
+            <a:picLocks noChangeAspect="1"/>
+          </p:cNvPicPr>
+          <p:nvPr/>
+        </p:nvPicPr>
+        <p:blipFill>
+          <a:blip r:embed="rId3">
+            <a:alphaModFix amt="50000"/>
+          </a:blip>
+          <a:srcRect t="15901" b="21803"/>
+          <a:stretch>
+            <a:fillRect/>
+          </a:stretch>
+        </p:blipFill>
+        <p:spPr>
+          <a:xfrm flipH="1">
+            <a:off x="9853479" y="3326347"/>
+            <a:ext cx="584178" cy="363916"/>
+          </a:xfrm>
+          <a:prstGeom prst="rect">
+            <a:avLst/>
+          </a:prstGeom>
+        </p:spPr>
+      </p:pic>
+      <p:pic>
+        <p:nvPicPr>
+          <p:cNvPr id="9" name="Picture 4">
+            <a:extLst>
+              <a:ext uri="{FF2B5EF4-FFF2-40B4-BE49-F238E27FC236}">
+                <a16:creationId xmlns:a16="http://schemas.microsoft.com/office/drawing/2014/main" id="{5ED39728-6CA6-1755-C21C-D70BD44477A2}"/>
+              </a:ext>
+            </a:extLst>
+          </p:cNvPr>
+          <p:cNvPicPr>
+            <a:picLocks noChangeAspect="1" noChangeArrowheads="1"/>
+          </p:cNvPicPr>
+          <p:nvPr/>
+        </p:nvPicPr>
+        <p:blipFill>
+          <a:blip r:embed="rId4">
+            <a:alphaModFix amt="20000"/>
+            <a:extLst>
+              <a:ext uri="{28A0092B-C50C-407E-A947-70E740481C1C}">
+                <a14:useLocalDpi xmlns:a14="http://schemas.microsoft.com/office/drawing/2010/main" val="0"/>
+              </a:ext>
+            </a:extLst>
+          </a:blip>
+          <a:srcRect/>
+          <a:stretch>
+            <a:fillRect/>
+          </a:stretch>
+        </p:blipFill>
+        <p:spPr bwMode="auto">
+          <a:xfrm>
+            <a:off x="9559952" y="2864272"/>
+            <a:ext cx="420042" cy="540054"/>
+          </a:xfrm>
+          <a:prstGeom prst="rect">
+            <a:avLst/>
+          </a:prstGeom>
+          <a:noFill/>
+          <a:extLst>
+            <a:ext uri="{909E8E84-426E-40DD-AFC4-6F175D3DCCD1}">
+              <a14:hiddenFill xmlns:a14="http://schemas.microsoft.com/office/drawing/2010/main">
+                <a:solidFill>
+                  <a:srgbClr val="FFFFFF"/>
+                </a:solidFill>
+              </a14:hiddenFill>
+            </a:ext>
+          </a:extLst>
+        </p:spPr>
+      </p:pic>
+      <p:pic>
+        <p:nvPicPr>
+          <p:cNvPr id="10" name="Picture 9">
+            <a:extLst>
+              <a:ext uri="{FF2B5EF4-FFF2-40B4-BE49-F238E27FC236}">
+                <a16:creationId xmlns:a16="http://schemas.microsoft.com/office/drawing/2014/main" id="{EF4212AA-01A7-B2AC-AC58-353FE28F52D3}"/>
+              </a:ext>
+            </a:extLst>
+          </p:cNvPr>
+          <p:cNvPicPr>
+            <a:picLocks noChangeAspect="1"/>
+          </p:cNvPicPr>
+          <p:nvPr/>
+        </p:nvPicPr>
+        <p:blipFill>
+          <a:blip r:embed="rId2">
+            <a:alphaModFix amt="35000"/>
+          </a:blip>
+          <a:stretch>
+            <a:fillRect/>
+          </a:stretch>
+        </p:blipFill>
+        <p:spPr>
+          <a:xfrm>
+            <a:off x="11280335" y="2758544"/>
+            <a:ext cx="521506" cy="590900"/>
+          </a:xfrm>
+          <a:prstGeom prst="rect">
+            <a:avLst/>
+          </a:prstGeom>
+        </p:spPr>
+      </p:pic>
+      <p:pic>
+        <p:nvPicPr>
+          <p:cNvPr id="11" name="Picture 10">
+            <a:extLst>
+              <a:ext uri="{FF2B5EF4-FFF2-40B4-BE49-F238E27FC236}">
+                <a16:creationId xmlns:a16="http://schemas.microsoft.com/office/drawing/2014/main" id="{1B63E505-10E3-1E54-CA98-768CCB8B9D18}"/>
+              </a:ext>
+            </a:extLst>
+          </p:cNvPr>
+          <p:cNvPicPr>
+            <a:picLocks noChangeAspect="1"/>
+          </p:cNvPicPr>
+          <p:nvPr/>
+        </p:nvPicPr>
+        <p:blipFill>
+          <a:blip r:embed="rId3">
+            <a:alphaModFix amt="50000"/>
+          </a:blip>
+          <a:srcRect t="15901" b="21803"/>
+          <a:stretch>
+            <a:fillRect/>
+          </a:stretch>
+        </p:blipFill>
+        <p:spPr>
+          <a:xfrm flipH="1">
+            <a:off x="11164483" y="3326347"/>
+            <a:ext cx="584178" cy="363916"/>
+          </a:xfrm>
+          <a:prstGeom prst="rect">
+            <a:avLst/>
+          </a:prstGeom>
+        </p:spPr>
+      </p:pic>
+      <p:pic>
+        <p:nvPicPr>
+          <p:cNvPr id="12" name="Picture 4">
+            <a:extLst>
+              <a:ext uri="{FF2B5EF4-FFF2-40B4-BE49-F238E27FC236}">
+                <a16:creationId xmlns:a16="http://schemas.microsoft.com/office/drawing/2014/main" id="{58AB3212-3FAA-F1A7-F2E8-4EB81CDC4BB0}"/>
+              </a:ext>
+            </a:extLst>
+          </p:cNvPr>
+          <p:cNvPicPr>
+            <a:picLocks noChangeAspect="1" noChangeArrowheads="1"/>
+          </p:cNvPicPr>
+          <p:nvPr/>
+        </p:nvPicPr>
+        <p:blipFill>
+          <a:blip r:embed="rId4">
+            <a:alphaModFix amt="20000"/>
+            <a:extLst>
+              <a:ext uri="{28A0092B-C50C-407E-A947-70E740481C1C}">
+                <a14:useLocalDpi xmlns:a14="http://schemas.microsoft.com/office/drawing/2010/main" val="0"/>
+              </a:ext>
+            </a:extLst>
+          </a:blip>
+          <a:srcRect/>
+          <a:stretch>
+            <a:fillRect/>
+          </a:stretch>
+        </p:blipFill>
+        <p:spPr bwMode="auto">
+          <a:xfrm>
+            <a:off x="10870956" y="2864272"/>
+            <a:ext cx="420042" cy="540054"/>
+          </a:xfrm>
+          <a:prstGeom prst="rect">
+            <a:avLst/>
+          </a:prstGeom>
+          <a:noFill/>
+          <a:extLst>
+            <a:ext uri="{909E8E84-426E-40DD-AFC4-6F175D3DCCD1}">
+              <a14:hiddenFill xmlns:a14="http://schemas.microsoft.com/office/drawing/2010/main">
+                <a:solidFill>
+                  <a:srgbClr val="FFFFFF"/>
+                </a:solidFill>
+              </a14:hiddenFill>
+            </a:ext>
+          </a:extLst>
+        </p:spPr>
+      </p:pic>
+      <p:pic>
+        <p:nvPicPr>
+          <p:cNvPr id="13" name="Picture 2" descr="Free Dna Icon - Download SVG, PNG for Science &amp; Technology | IconScout">
+            <a:extLst>
+              <a:ext uri="{FF2B5EF4-FFF2-40B4-BE49-F238E27FC236}">
+                <a16:creationId xmlns:a16="http://schemas.microsoft.com/office/drawing/2014/main" id="{EEBE5850-D9AD-3727-0CAE-7E22803B9E29}"/>
+              </a:ext>
+            </a:extLst>
+          </p:cNvPr>
+          <p:cNvPicPr>
+            <a:picLocks noChangeAspect="1" noChangeArrowheads="1"/>
+          </p:cNvPicPr>
+          <p:nvPr/>
+        </p:nvPicPr>
+        <p:blipFill>
+          <a:blip r:embed="rId5">
+            <a:duotone>
+              <a:prstClr val="black"/>
+              <a:schemeClr val="tx2">
+                <a:tint val="45000"/>
+                <a:satMod val="400000"/>
+              </a:schemeClr>
+            </a:duotone>
+            <a:alphaModFix amt="35000"/>
+            <a:extLst>
+              <a:ext uri="{28A0092B-C50C-407E-A947-70E740481C1C}">
+                <a14:useLocalDpi xmlns:a14="http://schemas.microsoft.com/office/drawing/2010/main" val="0"/>
+              </a:ext>
+            </a:extLst>
+          </a:blip>
+          <a:srcRect/>
+          <a:stretch>
+            <a:fillRect/>
+          </a:stretch>
+        </p:blipFill>
+        <p:spPr bwMode="auto">
+          <a:xfrm rot="2700000">
+            <a:off x="8672653" y="2804846"/>
+            <a:ext cx="538159" cy="538159"/>
+          </a:xfrm>
+          <a:prstGeom prst="rect">
+            <a:avLst/>
+          </a:prstGeom>
+          <a:noFill/>
+          <a:extLst>
+            <a:ext uri="{909E8E84-426E-40DD-AFC4-6F175D3DCCD1}">
+              <a14:hiddenFill xmlns:a14="http://schemas.microsoft.com/office/drawing/2010/main">
+                <a:solidFill>
+                  <a:srgbClr val="FFFFFF"/>
+                </a:solidFill>
+              </a14:hiddenFill>
+            </a:ext>
+          </a:extLst>
+        </p:spPr>
+      </p:pic>
+      <p:pic>
+        <p:nvPicPr>
+          <p:cNvPr id="14" name="Picture 2" descr="Free Dna Icon - Download SVG, PNG for Science &amp; Technology | IconScout">
+            <a:extLst>
+              <a:ext uri="{FF2B5EF4-FFF2-40B4-BE49-F238E27FC236}">
+                <a16:creationId xmlns:a16="http://schemas.microsoft.com/office/drawing/2014/main" id="{B4F2458D-2387-9F87-C812-45C53E0A30C9}"/>
+              </a:ext>
+            </a:extLst>
+          </p:cNvPr>
+          <p:cNvPicPr>
+            <a:picLocks noChangeAspect="1" noChangeArrowheads="1"/>
+          </p:cNvPicPr>
+          <p:nvPr/>
+        </p:nvPicPr>
+        <p:blipFill>
+          <a:blip r:embed="rId5">
+            <a:duotone>
+              <a:prstClr val="black"/>
+              <a:schemeClr val="tx2">
+                <a:tint val="45000"/>
+                <a:satMod val="400000"/>
+              </a:schemeClr>
+            </a:duotone>
+            <a:alphaModFix amt="35000"/>
+            <a:extLst>
+              <a:ext uri="{28A0092B-C50C-407E-A947-70E740481C1C}">
+                <a14:useLocalDpi xmlns:a14="http://schemas.microsoft.com/office/drawing/2010/main" val="0"/>
+              </a:ext>
+            </a:extLst>
+          </a:blip>
+          <a:srcRect/>
+          <a:stretch>
+            <a:fillRect/>
+          </a:stretch>
+        </p:blipFill>
+        <p:spPr bwMode="auto">
+          <a:xfrm rot="2700000">
+            <a:off x="8645554" y="3172391"/>
+            <a:ext cx="538159" cy="538159"/>
+          </a:xfrm>
+          <a:prstGeom prst="rect">
+            <a:avLst/>
+          </a:prstGeom>
+          <a:noFill/>
+          <a:extLst>
+            <a:ext uri="{909E8E84-426E-40DD-AFC4-6F175D3DCCD1}">
+              <a14:hiddenFill xmlns:a14="http://schemas.microsoft.com/office/drawing/2010/main">
+                <a:solidFill>
+                  <a:srgbClr val="FFFFFF"/>
+                </a:solidFill>
+              </a14:hiddenFill>
+            </a:ext>
+          </a:extLst>
+        </p:spPr>
+      </p:pic>
+      <p:pic>
+        <p:nvPicPr>
+          <p:cNvPr id="15" name="Picture 6" descr="No sign icon vector simple 14620271 Vector Art at Vecteezy">
+            <a:extLst>
+              <a:ext uri="{FF2B5EF4-FFF2-40B4-BE49-F238E27FC236}">
+                <a16:creationId xmlns:a16="http://schemas.microsoft.com/office/drawing/2014/main" id="{E2C8FACA-BA91-60F7-FB2D-C112AE62269F}"/>
+              </a:ext>
+            </a:extLst>
+          </p:cNvPr>
+          <p:cNvPicPr>
+            <a:picLocks noChangeAspect="1" noChangeArrowheads="1"/>
+          </p:cNvPicPr>
+          <p:nvPr/>
+        </p:nvPicPr>
+        <p:blipFill>
+          <a:blip r:embed="rId6">
+            <a:extLst>
+              <a:ext uri="{28A0092B-C50C-407E-A947-70E740481C1C}">
+                <a14:useLocalDpi xmlns:a14="http://schemas.microsoft.com/office/drawing/2010/main" val="0"/>
+              </a:ext>
+            </a:extLst>
+          </a:blip>
+          <a:srcRect/>
+          <a:stretch>
+            <a:fillRect/>
+          </a:stretch>
+        </p:blipFill>
+        <p:spPr bwMode="auto">
+          <a:xfrm>
+            <a:off x="9358867" y="2421736"/>
+            <a:ext cx="190271" cy="190271"/>
+          </a:xfrm>
+          <a:prstGeom prst="ellipse">
+            <a:avLst/>
+          </a:prstGeom>
+          <a:noFill/>
+          <a:extLst>
+            <a:ext uri="{909E8E84-426E-40DD-AFC4-6F175D3DCCD1}">
+              <a14:hiddenFill xmlns:a14="http://schemas.microsoft.com/office/drawing/2010/main">
+                <a:solidFill>
+                  <a:srgbClr val="FFFFFF"/>
+                </a:solidFill>
+              </a14:hiddenFill>
+            </a:ext>
+          </a:extLst>
+        </p:spPr>
+      </p:pic>
+      <p:pic>
+        <p:nvPicPr>
+          <p:cNvPr id="16" name="Picture 6" descr="No sign icon vector simple 14620271 Vector Art at Vecteezy">
+            <a:extLst>
+              <a:ext uri="{FF2B5EF4-FFF2-40B4-BE49-F238E27FC236}">
+                <a16:creationId xmlns:a16="http://schemas.microsoft.com/office/drawing/2014/main" id="{93B8D3E5-52C0-4A13-AD87-002B437F127C}"/>
+              </a:ext>
+            </a:extLst>
+          </p:cNvPr>
+          <p:cNvPicPr>
+            <a:picLocks noChangeAspect="1" noChangeArrowheads="1"/>
+          </p:cNvPicPr>
+          <p:nvPr/>
+        </p:nvPicPr>
+        <p:blipFill>
+          <a:blip r:embed="rId6">
+            <a:extLst>
+              <a:ext uri="{28A0092B-C50C-407E-A947-70E740481C1C}">
+                <a14:useLocalDpi xmlns:a14="http://schemas.microsoft.com/office/drawing/2010/main" val="0"/>
+              </a:ext>
+            </a:extLst>
+          </a:blip>
+          <a:srcRect/>
+          <a:stretch>
+            <a:fillRect/>
+          </a:stretch>
+        </p:blipFill>
+        <p:spPr bwMode="auto">
+          <a:xfrm>
+            <a:off x="10732848" y="2421735"/>
+            <a:ext cx="190271" cy="190271"/>
+          </a:xfrm>
+          <a:prstGeom prst="ellipse">
+            <a:avLst/>
+          </a:prstGeom>
+          <a:noFill/>
+          <a:extLst>
+            <a:ext uri="{909E8E84-426E-40DD-AFC4-6F175D3DCCD1}">
+              <a14:hiddenFill xmlns:a14="http://schemas.microsoft.com/office/drawing/2010/main">
+                <a:solidFill>
+                  <a:srgbClr val="FFFFFF"/>
+                </a:solidFill>
+              </a14:hiddenFill>
+            </a:ext>
+          </a:extLst>
+        </p:spPr>
+      </p:pic>
+      <p:cxnSp>
+        <p:nvCxnSpPr>
+          <p:cNvPr id="17" name="Curved Connector 16">
+            <a:extLst>
+              <a:ext uri="{FF2B5EF4-FFF2-40B4-BE49-F238E27FC236}">
+                <a16:creationId xmlns:a16="http://schemas.microsoft.com/office/drawing/2014/main" id="{2A47BD60-22AF-6397-4EB7-2FB0EEF1F5FD}"/>
+              </a:ext>
+            </a:extLst>
+          </p:cNvPr>
+          <p:cNvCxnSpPr>
+            <a:cxnSpLocks/>
+          </p:cNvCxnSpPr>
+          <p:nvPr/>
+        </p:nvCxnSpPr>
+        <p:spPr>
+          <a:xfrm rot="5400000" flipH="1" flipV="1">
+            <a:off x="10099936" y="2427059"/>
+            <a:ext cx="8693" cy="2592991"/>
+          </a:xfrm>
+          <a:prstGeom prst="curvedConnector3">
+            <a:avLst>
+              <a:gd name="adj1" fmla="val -4035120"/>
+            </a:avLst>
+          </a:prstGeom>
+          <a:ln w="19050">
+            <a:solidFill>
+              <a:schemeClr val="bg1">
+                <a:lumMod val="75000"/>
+              </a:schemeClr>
+            </a:solidFill>
+            <a:prstDash val="sysDash"/>
+            <a:tailEnd type="triangle"/>
+          </a:ln>
+        </p:spPr>
+        <p:style>
+          <a:lnRef idx="2">
+            <a:schemeClr val="accent1"/>
+          </a:lnRef>
+          <a:fillRef idx="0">
+            <a:schemeClr val="accent1"/>
+          </a:fillRef>
+          <a:effectRef idx="1">
+            <a:schemeClr val="accent1"/>
+          </a:effectRef>
+          <a:fontRef idx="minor">
+            <a:schemeClr val="tx1"/>
+          </a:fontRef>
+        </p:style>
+      </p:cxnSp>
+      <p:pic>
+        <p:nvPicPr>
+          <p:cNvPr id="18" name="Picture 6" descr="No sign icon vector simple 14620271 Vector Art at Vecteezy">
+            <a:extLst>
+              <a:ext uri="{FF2B5EF4-FFF2-40B4-BE49-F238E27FC236}">
+                <a16:creationId xmlns:a16="http://schemas.microsoft.com/office/drawing/2014/main" id="{3AF58068-C397-F253-BF8A-602179832670}"/>
+              </a:ext>
+            </a:extLst>
+          </p:cNvPr>
+          <p:cNvPicPr>
+            <a:picLocks noChangeAspect="1" noChangeArrowheads="1"/>
+          </p:cNvPicPr>
+          <p:nvPr/>
+        </p:nvPicPr>
+        <p:blipFill>
+          <a:blip r:embed="rId6">
+            <a:extLst>
+              <a:ext uri="{28A0092B-C50C-407E-A947-70E740481C1C}">
+                <a14:useLocalDpi xmlns:a14="http://schemas.microsoft.com/office/drawing/2010/main" val="0"/>
+              </a:ext>
+            </a:extLst>
+          </a:blip>
+          <a:srcRect/>
+          <a:stretch>
+            <a:fillRect/>
+          </a:stretch>
+        </p:blipFill>
+        <p:spPr bwMode="auto">
+          <a:xfrm>
+            <a:off x="10013199" y="3992528"/>
+            <a:ext cx="190271" cy="190271"/>
+          </a:xfrm>
+          <a:prstGeom prst="ellipse">
+            <a:avLst/>
+          </a:prstGeom>
+          <a:noFill/>
+          <a:extLst>
+            <a:ext uri="{909E8E84-426E-40DD-AFC4-6F175D3DCCD1}">
+              <a14:hiddenFill xmlns:a14="http://schemas.microsoft.com/office/drawing/2010/main">
+                <a:solidFill>
+                  <a:srgbClr val="FFFFFF"/>
+                </a:solidFill>
+              </a14:hiddenFill>
+            </a:ext>
+          </a:extLst>
+        </p:spPr>
+      </p:pic>
+      <p:cxnSp>
+        <p:nvCxnSpPr>
+          <p:cNvPr id="19" name="Straight Arrow Connector 18">
+            <a:extLst>
+              <a:ext uri="{FF2B5EF4-FFF2-40B4-BE49-F238E27FC236}">
+                <a16:creationId xmlns:a16="http://schemas.microsoft.com/office/drawing/2014/main" id="{B0ABDFEE-3582-BBD2-6C54-FF3F60F6209D}"/>
+              </a:ext>
+            </a:extLst>
+          </p:cNvPr>
+          <p:cNvCxnSpPr>
+            <a:cxnSpLocks/>
+          </p:cNvCxnSpPr>
+          <p:nvPr/>
+        </p:nvCxnSpPr>
+        <p:spPr>
+          <a:xfrm>
+            <a:off x="10517280" y="3152799"/>
+            <a:ext cx="340717" cy="7299"/>
+          </a:xfrm>
+          <a:prstGeom prst="straightConnector1">
+            <a:avLst/>
+          </a:prstGeom>
+          <a:ln w="38100">
+            <a:solidFill>
+              <a:schemeClr val="tx1"/>
+            </a:solidFill>
+            <a:tailEnd type="triangle"/>
+          </a:ln>
+        </p:spPr>
+        <p:style>
+          <a:lnRef idx="2">
+            <a:schemeClr val="dk1"/>
+          </a:lnRef>
+          <a:fillRef idx="0">
+            <a:schemeClr val="dk1"/>
+          </a:fillRef>
+          <a:effectRef idx="1">
+            <a:schemeClr val="dk1"/>
+          </a:effectRef>
+          <a:fontRef idx="minor">
+            <a:schemeClr val="tx1"/>
+          </a:fontRef>
+        </p:style>
+      </p:cxnSp>
+      <p:pic>
+        <p:nvPicPr>
+          <p:cNvPr id="20" name="Picture 2" descr="Free Dna Icon - Download SVG, PNG for Science &amp; Technology | IconScout">
+            <a:extLst>
+              <a:ext uri="{FF2B5EF4-FFF2-40B4-BE49-F238E27FC236}">
+                <a16:creationId xmlns:a16="http://schemas.microsoft.com/office/drawing/2014/main" id="{52CFA37C-00AC-402A-93EE-7EA9D931C13E}"/>
+              </a:ext>
+            </a:extLst>
+          </p:cNvPr>
+          <p:cNvPicPr>
+            <a:picLocks noChangeAspect="1" noChangeArrowheads="1"/>
+          </p:cNvPicPr>
+          <p:nvPr/>
+        </p:nvPicPr>
+        <p:blipFill>
+          <a:blip r:embed="rId5">
+            <a:duotone>
+              <a:prstClr val="black"/>
+              <a:schemeClr val="tx2">
+                <a:tint val="45000"/>
+                <a:satMod val="400000"/>
+              </a:schemeClr>
+            </a:duotone>
+            <a:alphaModFix amt="35000"/>
+            <a:extLst>
+              <a:ext uri="{28A0092B-C50C-407E-A947-70E740481C1C}">
+                <a14:useLocalDpi xmlns:a14="http://schemas.microsoft.com/office/drawing/2010/main" val="0"/>
+              </a:ext>
+            </a:extLst>
+          </a:blip>
+          <a:srcRect/>
+          <a:stretch>
+            <a:fillRect/>
+          </a:stretch>
+        </p:blipFill>
+        <p:spPr bwMode="auto">
+          <a:xfrm rot="2700000">
+            <a:off x="8336519" y="2755390"/>
+            <a:ext cx="538159" cy="538159"/>
+          </a:xfrm>
+          <a:prstGeom prst="rect">
+            <a:avLst/>
+          </a:prstGeom>
+          <a:noFill/>
+          <a:extLst>
+            <a:ext uri="{909E8E84-426E-40DD-AFC4-6F175D3DCCD1}">
+              <a14:hiddenFill xmlns:a14="http://schemas.microsoft.com/office/drawing/2010/main">
+                <a:solidFill>
+                  <a:srgbClr val="FFFFFF"/>
+                </a:solidFill>
+              </a14:hiddenFill>
+            </a:ext>
+          </a:extLst>
         </p:spPr>
       </p:pic>
     </p:spTree>
     <p:extLst>
       <p:ext uri="{BB962C8B-B14F-4D97-AF65-F5344CB8AC3E}">
-        <p14:creationId xmlns:p14="http://schemas.microsoft.com/office/powerpoint/2010/main" val="790247795"/>
+        <p14:creationId xmlns:p14="http://schemas.microsoft.com/office/powerpoint/2010/main" val="1450291475"/>
       </p:ext>
     </p:extLst>
   </p:cSld>
